--- a/slides/3-6_reversal_residual_block/3-6_reversal_residual_block.pptx
+++ b/slides/3-6_reversal_residual_block/3-6_reversal_residual_block.pptx
@@ -2359,7 +2359,7 @@
           </a:xfrm>
           <a:prstGeom prst="roundRect">
             <a:avLst>
-              <a:gd name="adj" fmla="val 15625"/>
+              <a:gd name="adj" fmla="val 7813"/>
             </a:avLst>
           </a:prstGeom>
           <a:solidFill>
@@ -2368,14 +2368,14 @@
           <a:ln/>
         </p:spPr>
         <p:txBody>
-          <a:bodyPr wrap="square" lIns="0" tIns="0" rIns="0" bIns="0" rtlCol="0" anchor="ctr"/>
+          <a:bodyPr wrap="none" lIns="0" tIns="0" rIns="0" bIns="0" rtlCol="0" anchor="ctr"/>
           <a:lstStyle/>
           <a:p>
             <a:pPr algn="ctr" indent="0" marL="0">
               <a:buNone/>
             </a:pPr>
             <a:r>
-              <a:rPr lang="ja-JP" altLang="en-US" sz="1100" dirty="0">
+              <a:rPr lang="ja-JP" altLang="en-US" sz="1050" dirty="0">
                 <a:solidFill>
                   <a:srgbClr val="404040"/>
                 </a:solidFill>
@@ -2385,14 +2385,14 @@
               </a:rPr>
               <a:t>残存</a:t>
             </a:r>
-            <a:endParaRPr lang="ja-JP" sz="1100" dirty="0"/>
+            <a:endParaRPr lang="ja-JP" sz="1050" dirty="0"/>
           </a:p>
           <a:p>
             <a:pPr algn="ctr" indent="0" marL="0">
               <a:buNone/>
             </a:pPr>
             <a:r>
-              <a:rPr lang="ja-JP" altLang="en-US" sz="1100" dirty="0">
+              <a:rPr lang="ja-JP" altLang="en-US" sz="1050" dirty="0">
                 <a:solidFill>
                   <a:srgbClr val="404040"/>
                 </a:solidFill>
@@ -2402,7 +2402,7 @@
               </a:rPr>
               <a:t>筋弛緩</a:t>
             </a:r>
-            <a:endParaRPr lang="ja-JP" sz="1100" dirty="0"/>
+            <a:endParaRPr lang="ja-JP" sz="1050" dirty="0"/>
           </a:p>
         </p:txBody>
       </p:sp>
@@ -2419,7 +2419,7 @@
           </a:xfrm>
           <a:prstGeom prst="roundRect">
             <a:avLst>
-              <a:gd name="adj" fmla="val 15625"/>
+              <a:gd name="adj" fmla="val 7813"/>
             </a:avLst>
           </a:prstGeom>
           <a:solidFill>
@@ -2428,14 +2428,14 @@
           <a:ln/>
         </p:spPr>
         <p:txBody>
-          <a:bodyPr wrap="square" lIns="0" tIns="0" rIns="0" bIns="0" rtlCol="0" anchor="ctr"/>
+          <a:bodyPr wrap="none" lIns="0" tIns="0" rIns="0" bIns="0" rtlCol="0" anchor="ctr"/>
           <a:lstStyle/>
           <a:p>
             <a:pPr algn="ctr" indent="0" marL="0">
               <a:buNone/>
             </a:pPr>
             <a:r>
-              <a:rPr lang="ja-JP" altLang="en-US" sz="1100" dirty="0">
+              <a:rPr lang="ja-JP" altLang="en-US" sz="1050" dirty="0">
                 <a:solidFill>
                   <a:srgbClr val="404040"/>
                 </a:solidFill>
@@ -2445,14 +2445,14 @@
               </a:rPr>
               <a:t>スガマ</a:t>
             </a:r>
-            <a:endParaRPr lang="ja-JP" sz="1100" dirty="0"/>
+            <a:endParaRPr lang="ja-JP" sz="1050" dirty="0"/>
           </a:p>
           <a:p>
             <a:pPr algn="ctr" indent="0" marL="0">
               <a:buNone/>
             </a:pPr>
             <a:r>
-              <a:rPr lang="ja-JP" altLang="en-US" sz="1100" dirty="0">
+              <a:rPr lang="ja-JP" altLang="en-US" sz="1050" dirty="0">
                 <a:solidFill>
                   <a:srgbClr val="404040"/>
                 </a:solidFill>
@@ -2462,7 +2462,7 @@
               </a:rPr>
               <a:t>デクス</a:t>
             </a:r>
-            <a:endParaRPr lang="ja-JP" sz="1100" dirty="0"/>
+            <a:endParaRPr lang="ja-JP" sz="1050" dirty="0"/>
           </a:p>
         </p:txBody>
       </p:sp>
@@ -2479,7 +2479,7 @@
           </a:xfrm>
           <a:prstGeom prst="roundRect">
             <a:avLst>
-              <a:gd name="adj" fmla="val 15625"/>
+              <a:gd name="adj" fmla="val 7813"/>
             </a:avLst>
           </a:prstGeom>
           <a:solidFill>
@@ -2488,14 +2488,14 @@
           <a:ln/>
         </p:spPr>
         <p:txBody>
-          <a:bodyPr wrap="square" lIns="0" tIns="0" rIns="0" bIns="0" rtlCol="0" anchor="ctr"/>
+          <a:bodyPr wrap="none" lIns="0" tIns="0" rIns="0" bIns="0" rtlCol="0" anchor="ctr"/>
           <a:lstStyle/>
           <a:p>
             <a:pPr algn="ctr" indent="0" marL="0">
               <a:buNone/>
             </a:pPr>
             <a:r>
-              <a:rPr lang="ja-JP" altLang="en-US" sz="1100" dirty="0">
+              <a:rPr lang="ja-JP" altLang="en-US" sz="1050" dirty="0">
                 <a:solidFill>
                   <a:srgbClr val="404040"/>
                 </a:solidFill>
@@ -2505,14 +2505,14 @@
               </a:rPr>
               <a:t>ネオスチ</a:t>
             </a:r>
-            <a:endParaRPr lang="ja-JP" sz="1100" dirty="0"/>
+            <a:endParaRPr lang="ja-JP" sz="1050" dirty="0"/>
           </a:p>
           <a:p>
             <a:pPr algn="ctr" indent="0" marL="0">
               <a:buNone/>
             </a:pPr>
             <a:r>
-              <a:rPr lang="ja-JP" altLang="en-US" sz="1100" dirty="0">
+              <a:rPr lang="ja-JP" altLang="en-US" sz="1050" dirty="0">
                 <a:solidFill>
                   <a:srgbClr val="404040"/>
                 </a:solidFill>
@@ -2522,7 +2522,7 @@
               </a:rPr>
               <a:t>グミン</a:t>
             </a:r>
-            <a:endParaRPr lang="ja-JP" sz="1100" dirty="0"/>
+            <a:endParaRPr lang="ja-JP" sz="1050" dirty="0"/>
           </a:p>
         </p:txBody>
       </p:sp>
@@ -2539,7 +2539,7 @@
           </a:xfrm>
           <a:prstGeom prst="roundRect">
             <a:avLst>
-              <a:gd name="adj" fmla="val 15625"/>
+              <a:gd name="adj" fmla="val 7813"/>
             </a:avLst>
           </a:prstGeom>
           <a:solidFill>
@@ -2548,14 +2548,14 @@
           <a:ln/>
         </p:spPr>
         <p:txBody>
-          <a:bodyPr wrap="square" lIns="0" tIns="0" rIns="0" bIns="0" rtlCol="0" anchor="ctr"/>
+          <a:bodyPr wrap="none" lIns="0" tIns="0" rIns="0" bIns="0" rtlCol="0" anchor="ctr"/>
           <a:lstStyle/>
           <a:p>
             <a:pPr algn="ctr" indent="0" marL="0">
               <a:buNone/>
             </a:pPr>
             <a:r>
-              <a:rPr lang="ja-JP" altLang="en-US" sz="1100" dirty="0">
+              <a:rPr lang="ja-JP" altLang="en-US" sz="1050" dirty="0">
                 <a:solidFill>
                   <a:srgbClr val="404040"/>
                 </a:solidFill>
@@ -2565,14 +2565,14 @@
               </a:rPr>
               <a:t>再クラ</a:t>
             </a:r>
-            <a:endParaRPr lang="ja-JP" sz="1100" dirty="0"/>
+            <a:endParaRPr lang="ja-JP" sz="1050" dirty="0"/>
           </a:p>
           <a:p>
             <a:pPr algn="ctr" indent="0" marL="0">
               <a:buNone/>
             </a:pPr>
             <a:r>
-              <a:rPr lang="ja-JP" altLang="en-US" sz="1100" dirty="0">
+              <a:rPr lang="ja-JP" altLang="en-US" sz="1050" dirty="0">
                 <a:solidFill>
                   <a:srgbClr val="404040"/>
                 </a:solidFill>
@@ -2582,7 +2582,7 @@
               </a:rPr>
               <a:t>ーレ化</a:t>
             </a:r>
-            <a:endParaRPr lang="ja-JP" sz="1100" dirty="0"/>
+            <a:endParaRPr lang="ja-JP" sz="1050" dirty="0"/>
           </a:p>
         </p:txBody>
       </p:sp>
@@ -2599,7 +2599,7 @@
           </a:xfrm>
           <a:prstGeom prst="roundRect">
             <a:avLst>
-              <a:gd name="adj" fmla="val 15625"/>
+              <a:gd name="adj" fmla="val 7813"/>
             </a:avLst>
           </a:prstGeom>
           <a:solidFill>
@@ -2608,14 +2608,14 @@
           <a:ln/>
         </p:spPr>
         <p:txBody>
-          <a:bodyPr wrap="square" lIns="0" tIns="0" rIns="0" bIns="0" rtlCol="0" anchor="ctr"/>
+          <a:bodyPr wrap="none" lIns="0" tIns="0" rIns="0" bIns="0" rtlCol="0" anchor="ctr"/>
           <a:lstStyle/>
           <a:p>
             <a:pPr algn="ctr" indent="0" marL="0">
               <a:buNone/>
             </a:pPr>
             <a:r>
-              <a:rPr lang="ja-JP" altLang="en-US" sz="1100" b="1" dirty="0">
+              <a:rPr lang="ja-JP" altLang="en-US" sz="1050" b="1" dirty="0">
                 <a:solidFill>
                   <a:srgbClr val="FFFFFF"/>
                 </a:solidFill>
@@ -2625,7 +2625,7 @@
               </a:rPr>
               <a:t>手順</a:t>
             </a:r>
-            <a:endParaRPr lang="ja-JP" sz="1100" dirty="0"/>
+            <a:endParaRPr lang="ja-JP" sz="1050" dirty="0"/>
           </a:p>
         </p:txBody>
       </p:sp>
@@ -3004,7 +3004,7 @@
           </a:xfrm>
           <a:prstGeom prst="roundRect">
             <a:avLst>
-              <a:gd name="adj" fmla="val 15625"/>
+              <a:gd name="adj" fmla="val 7813"/>
             </a:avLst>
           </a:prstGeom>
           <a:solidFill>
@@ -3013,14 +3013,14 @@
           <a:ln/>
         </p:spPr>
         <p:txBody>
-          <a:bodyPr wrap="square" lIns="0" tIns="0" rIns="0" bIns="0" rtlCol="0" anchor="ctr"/>
+          <a:bodyPr wrap="none" lIns="0" tIns="0" rIns="0" bIns="0" rtlCol="0" anchor="ctr"/>
           <a:lstStyle/>
           <a:p>
             <a:pPr algn="ctr" indent="0" marL="0">
               <a:buNone/>
             </a:pPr>
             <a:r>
-              <a:rPr lang="ja-JP" altLang="en-US" sz="1100" b="1" dirty="0">
+              <a:rPr lang="ja-JP" altLang="en-US" sz="1050" b="1" dirty="0">
                 <a:solidFill>
                   <a:srgbClr val="FFFFFF"/>
                 </a:solidFill>
@@ -3030,14 +3030,14 @@
               </a:rPr>
               <a:t>残存</a:t>
             </a:r>
-            <a:endParaRPr lang="ja-JP" sz="1100" dirty="0"/>
+            <a:endParaRPr lang="ja-JP" sz="1050" dirty="0"/>
           </a:p>
           <a:p>
             <a:pPr algn="ctr" indent="0" marL="0">
               <a:buNone/>
             </a:pPr>
             <a:r>
-              <a:rPr lang="ja-JP" altLang="en-US" sz="1100" b="1" dirty="0">
+              <a:rPr lang="ja-JP" altLang="en-US" sz="1050" b="1" dirty="0">
                 <a:solidFill>
                   <a:srgbClr val="FFFFFF"/>
                 </a:solidFill>
@@ -3047,7 +3047,7 @@
               </a:rPr>
               <a:t>筋弛緩</a:t>
             </a:r>
-            <a:endParaRPr lang="ja-JP" sz="1100" dirty="0"/>
+            <a:endParaRPr lang="ja-JP" sz="1050" dirty="0"/>
           </a:p>
         </p:txBody>
       </p:sp>
@@ -3064,7 +3064,7 @@
           </a:xfrm>
           <a:prstGeom prst="roundRect">
             <a:avLst>
-              <a:gd name="adj" fmla="val 15625"/>
+              <a:gd name="adj" fmla="val 7813"/>
             </a:avLst>
           </a:prstGeom>
           <a:solidFill>
@@ -3073,14 +3073,14 @@
           <a:ln/>
         </p:spPr>
         <p:txBody>
-          <a:bodyPr wrap="square" lIns="0" tIns="0" rIns="0" bIns="0" rtlCol="0" anchor="ctr"/>
+          <a:bodyPr wrap="none" lIns="0" tIns="0" rIns="0" bIns="0" rtlCol="0" anchor="ctr"/>
           <a:lstStyle/>
           <a:p>
             <a:pPr algn="ctr" indent="0" marL="0">
               <a:buNone/>
             </a:pPr>
             <a:r>
-              <a:rPr lang="ja-JP" altLang="en-US" sz="1100" dirty="0">
+              <a:rPr lang="ja-JP" altLang="en-US" sz="1050" dirty="0">
                 <a:solidFill>
                   <a:srgbClr val="404040"/>
                 </a:solidFill>
@@ -3090,14 +3090,14 @@
               </a:rPr>
               <a:t>スガマ</a:t>
             </a:r>
-            <a:endParaRPr lang="ja-JP" sz="1100" dirty="0"/>
+            <a:endParaRPr lang="ja-JP" sz="1050" dirty="0"/>
           </a:p>
           <a:p>
             <a:pPr algn="ctr" indent="0" marL="0">
               <a:buNone/>
             </a:pPr>
             <a:r>
-              <a:rPr lang="ja-JP" altLang="en-US" sz="1100" dirty="0">
+              <a:rPr lang="ja-JP" altLang="en-US" sz="1050" dirty="0">
                 <a:solidFill>
                   <a:srgbClr val="404040"/>
                 </a:solidFill>
@@ -3107,7 +3107,7 @@
               </a:rPr>
               <a:t>デクス</a:t>
             </a:r>
-            <a:endParaRPr lang="ja-JP" sz="1100" dirty="0"/>
+            <a:endParaRPr lang="ja-JP" sz="1050" dirty="0"/>
           </a:p>
         </p:txBody>
       </p:sp>
@@ -3124,7 +3124,7 @@
           </a:xfrm>
           <a:prstGeom prst="roundRect">
             <a:avLst>
-              <a:gd name="adj" fmla="val 15625"/>
+              <a:gd name="adj" fmla="val 7813"/>
             </a:avLst>
           </a:prstGeom>
           <a:solidFill>
@@ -3133,14 +3133,14 @@
           <a:ln/>
         </p:spPr>
         <p:txBody>
-          <a:bodyPr wrap="square" lIns="0" tIns="0" rIns="0" bIns="0" rtlCol="0" anchor="ctr"/>
+          <a:bodyPr wrap="none" lIns="0" tIns="0" rIns="0" bIns="0" rtlCol="0" anchor="ctr"/>
           <a:lstStyle/>
           <a:p>
             <a:pPr algn="ctr" indent="0" marL="0">
               <a:buNone/>
             </a:pPr>
             <a:r>
-              <a:rPr lang="ja-JP" altLang="en-US" sz="1100" dirty="0">
+              <a:rPr lang="ja-JP" altLang="en-US" sz="1050" dirty="0">
                 <a:solidFill>
                   <a:srgbClr val="404040"/>
                 </a:solidFill>
@@ -3150,14 +3150,14 @@
               </a:rPr>
               <a:t>ネオスチ</a:t>
             </a:r>
-            <a:endParaRPr lang="ja-JP" sz="1100" dirty="0"/>
+            <a:endParaRPr lang="ja-JP" sz="1050" dirty="0"/>
           </a:p>
           <a:p>
             <a:pPr algn="ctr" indent="0" marL="0">
               <a:buNone/>
             </a:pPr>
             <a:r>
-              <a:rPr lang="ja-JP" altLang="en-US" sz="1100" dirty="0">
+              <a:rPr lang="ja-JP" altLang="en-US" sz="1050" dirty="0">
                 <a:solidFill>
                   <a:srgbClr val="404040"/>
                 </a:solidFill>
@@ -3167,7 +3167,7 @@
               </a:rPr>
               <a:t>グミン</a:t>
             </a:r>
-            <a:endParaRPr lang="ja-JP" sz="1100" dirty="0"/>
+            <a:endParaRPr lang="ja-JP" sz="1050" dirty="0"/>
           </a:p>
         </p:txBody>
       </p:sp>
@@ -3184,7 +3184,7 @@
           </a:xfrm>
           <a:prstGeom prst="roundRect">
             <a:avLst>
-              <a:gd name="adj" fmla="val 15625"/>
+              <a:gd name="adj" fmla="val 7813"/>
             </a:avLst>
           </a:prstGeom>
           <a:solidFill>
@@ -3193,14 +3193,14 @@
           <a:ln/>
         </p:spPr>
         <p:txBody>
-          <a:bodyPr wrap="square" lIns="0" tIns="0" rIns="0" bIns="0" rtlCol="0" anchor="ctr"/>
+          <a:bodyPr wrap="none" lIns="0" tIns="0" rIns="0" bIns="0" rtlCol="0" anchor="ctr"/>
           <a:lstStyle/>
           <a:p>
             <a:pPr algn="ctr" indent="0" marL="0">
               <a:buNone/>
             </a:pPr>
             <a:r>
-              <a:rPr lang="ja-JP" altLang="en-US" sz="1100" dirty="0">
+              <a:rPr lang="ja-JP" altLang="en-US" sz="1050" dirty="0">
                 <a:solidFill>
                   <a:srgbClr val="404040"/>
                 </a:solidFill>
@@ -3210,14 +3210,14 @@
               </a:rPr>
               <a:t>再クラ</a:t>
             </a:r>
-            <a:endParaRPr lang="ja-JP" sz="1100" dirty="0"/>
+            <a:endParaRPr lang="ja-JP" sz="1050" dirty="0"/>
           </a:p>
           <a:p>
             <a:pPr algn="ctr" indent="0" marL="0">
               <a:buNone/>
             </a:pPr>
             <a:r>
-              <a:rPr lang="ja-JP" altLang="en-US" sz="1100" dirty="0">
+              <a:rPr lang="ja-JP" altLang="en-US" sz="1050" dirty="0">
                 <a:solidFill>
                   <a:srgbClr val="404040"/>
                 </a:solidFill>
@@ -3227,7 +3227,7 @@
               </a:rPr>
               <a:t>ーレ化</a:t>
             </a:r>
-            <a:endParaRPr lang="ja-JP" sz="1100" dirty="0"/>
+            <a:endParaRPr lang="ja-JP" sz="1050" dirty="0"/>
           </a:p>
         </p:txBody>
       </p:sp>
@@ -3244,7 +3244,7 @@
           </a:xfrm>
           <a:prstGeom prst="roundRect">
             <a:avLst>
-              <a:gd name="adj" fmla="val 15625"/>
+              <a:gd name="adj" fmla="val 7813"/>
             </a:avLst>
           </a:prstGeom>
           <a:solidFill>
@@ -3253,14 +3253,14 @@
           <a:ln/>
         </p:spPr>
         <p:txBody>
-          <a:bodyPr wrap="square" lIns="0" tIns="0" rIns="0" bIns="0" rtlCol="0" anchor="ctr"/>
+          <a:bodyPr wrap="none" lIns="0" tIns="0" rIns="0" bIns="0" rtlCol="0" anchor="ctr"/>
           <a:lstStyle/>
           <a:p>
             <a:pPr algn="ctr" indent="0" marL="0">
               <a:buNone/>
             </a:pPr>
             <a:r>
-              <a:rPr lang="ja-JP" altLang="en-US" sz="1100" dirty="0">
+              <a:rPr lang="ja-JP" altLang="en-US" sz="1050" dirty="0">
                 <a:solidFill>
                   <a:srgbClr val="404040"/>
                 </a:solidFill>
@@ -3270,7 +3270,7 @@
               </a:rPr>
               <a:t>手順</a:t>
             </a:r>
-            <a:endParaRPr lang="ja-JP" sz="1100" dirty="0"/>
+            <a:endParaRPr lang="ja-JP" sz="1050" dirty="0"/>
           </a:p>
         </p:txBody>
       </p:sp>
@@ -3703,7 +3703,7 @@
           </a:xfrm>
           <a:prstGeom prst="roundRect">
             <a:avLst>
-              <a:gd name="adj" fmla="val 15625"/>
+              <a:gd name="adj" fmla="val 7813"/>
             </a:avLst>
           </a:prstGeom>
           <a:solidFill>
@@ -3712,14 +3712,14 @@
           <a:ln/>
         </p:spPr>
         <p:txBody>
-          <a:bodyPr wrap="square" lIns="0" tIns="0" rIns="0" bIns="0" rtlCol="0" anchor="ctr"/>
+          <a:bodyPr wrap="none" lIns="0" tIns="0" rIns="0" bIns="0" rtlCol="0" anchor="ctr"/>
           <a:lstStyle/>
           <a:p>
             <a:pPr algn="ctr" indent="0" marL="0">
               <a:buNone/>
             </a:pPr>
             <a:r>
-              <a:rPr lang="ja-JP" altLang="en-US" sz="1100" b="1" dirty="0">
+              <a:rPr lang="ja-JP" altLang="en-US" sz="1050" b="1" dirty="0">
                 <a:solidFill>
                   <a:srgbClr val="FFFFFF"/>
                 </a:solidFill>
@@ -3729,14 +3729,14 @@
               </a:rPr>
               <a:t>残存</a:t>
             </a:r>
-            <a:endParaRPr lang="ja-JP" sz="1100" dirty="0"/>
+            <a:endParaRPr lang="ja-JP" sz="1050" dirty="0"/>
           </a:p>
           <a:p>
             <a:pPr algn="ctr" indent="0" marL="0">
               <a:buNone/>
             </a:pPr>
             <a:r>
-              <a:rPr lang="ja-JP" altLang="en-US" sz="1100" b="1" dirty="0">
+              <a:rPr lang="ja-JP" altLang="en-US" sz="1050" b="1" dirty="0">
                 <a:solidFill>
                   <a:srgbClr val="FFFFFF"/>
                 </a:solidFill>
@@ -3746,7 +3746,7 @@
               </a:rPr>
               <a:t>筋弛緩</a:t>
             </a:r>
-            <a:endParaRPr lang="ja-JP" sz="1100" dirty="0"/>
+            <a:endParaRPr lang="ja-JP" sz="1050" dirty="0"/>
           </a:p>
         </p:txBody>
       </p:sp>
@@ -3763,7 +3763,7 @@
           </a:xfrm>
           <a:prstGeom prst="roundRect">
             <a:avLst>
-              <a:gd name="adj" fmla="val 15625"/>
+              <a:gd name="adj" fmla="val 7813"/>
             </a:avLst>
           </a:prstGeom>
           <a:solidFill>
@@ -3772,14 +3772,14 @@
           <a:ln/>
         </p:spPr>
         <p:txBody>
-          <a:bodyPr wrap="square" lIns="0" tIns="0" rIns="0" bIns="0" rtlCol="0" anchor="ctr"/>
+          <a:bodyPr wrap="none" lIns="0" tIns="0" rIns="0" bIns="0" rtlCol="0" anchor="ctr"/>
           <a:lstStyle/>
           <a:p>
             <a:pPr algn="ctr" indent="0" marL="0">
               <a:buNone/>
             </a:pPr>
             <a:r>
-              <a:rPr lang="ja-JP" altLang="en-US" sz="1100" dirty="0">
+              <a:rPr lang="ja-JP" altLang="en-US" sz="1050" dirty="0">
                 <a:solidFill>
                   <a:srgbClr val="404040"/>
                 </a:solidFill>
@@ -3789,14 +3789,14 @@
               </a:rPr>
               <a:t>スガマ</a:t>
             </a:r>
-            <a:endParaRPr lang="ja-JP" sz="1100" dirty="0"/>
+            <a:endParaRPr lang="ja-JP" sz="1050" dirty="0"/>
           </a:p>
           <a:p>
             <a:pPr algn="ctr" indent="0" marL="0">
               <a:buNone/>
             </a:pPr>
             <a:r>
-              <a:rPr lang="ja-JP" altLang="en-US" sz="1100" dirty="0">
+              <a:rPr lang="ja-JP" altLang="en-US" sz="1050" dirty="0">
                 <a:solidFill>
                   <a:srgbClr val="404040"/>
                 </a:solidFill>
@@ -3806,7 +3806,7 @@
               </a:rPr>
               <a:t>デクス</a:t>
             </a:r>
-            <a:endParaRPr lang="ja-JP" sz="1100" dirty="0"/>
+            <a:endParaRPr lang="ja-JP" sz="1050" dirty="0"/>
           </a:p>
         </p:txBody>
       </p:sp>
@@ -3823,7 +3823,7 @@
           </a:xfrm>
           <a:prstGeom prst="roundRect">
             <a:avLst>
-              <a:gd name="adj" fmla="val 15625"/>
+              <a:gd name="adj" fmla="val 7813"/>
             </a:avLst>
           </a:prstGeom>
           <a:solidFill>
@@ -3832,14 +3832,14 @@
           <a:ln/>
         </p:spPr>
         <p:txBody>
-          <a:bodyPr wrap="square" lIns="0" tIns="0" rIns="0" bIns="0" rtlCol="0" anchor="ctr"/>
+          <a:bodyPr wrap="none" lIns="0" tIns="0" rIns="0" bIns="0" rtlCol="0" anchor="ctr"/>
           <a:lstStyle/>
           <a:p>
             <a:pPr algn="ctr" indent="0" marL="0">
               <a:buNone/>
             </a:pPr>
             <a:r>
-              <a:rPr lang="ja-JP" altLang="en-US" sz="1100" dirty="0">
+              <a:rPr lang="ja-JP" altLang="en-US" sz="1050" dirty="0">
                 <a:solidFill>
                   <a:srgbClr val="404040"/>
                 </a:solidFill>
@@ -3849,14 +3849,14 @@
               </a:rPr>
               <a:t>ネオスチ</a:t>
             </a:r>
-            <a:endParaRPr lang="ja-JP" sz="1100" dirty="0"/>
+            <a:endParaRPr lang="ja-JP" sz="1050" dirty="0"/>
           </a:p>
           <a:p>
             <a:pPr algn="ctr" indent="0" marL="0">
               <a:buNone/>
             </a:pPr>
             <a:r>
-              <a:rPr lang="ja-JP" altLang="en-US" sz="1100" dirty="0">
+              <a:rPr lang="ja-JP" altLang="en-US" sz="1050" dirty="0">
                 <a:solidFill>
                   <a:srgbClr val="404040"/>
                 </a:solidFill>
@@ -3866,7 +3866,7 @@
               </a:rPr>
               <a:t>グミン</a:t>
             </a:r>
-            <a:endParaRPr lang="ja-JP" sz="1100" dirty="0"/>
+            <a:endParaRPr lang="ja-JP" sz="1050" dirty="0"/>
           </a:p>
         </p:txBody>
       </p:sp>
@@ -3883,7 +3883,7 @@
           </a:xfrm>
           <a:prstGeom prst="roundRect">
             <a:avLst>
-              <a:gd name="adj" fmla="val 15625"/>
+              <a:gd name="adj" fmla="val 7813"/>
             </a:avLst>
           </a:prstGeom>
           <a:solidFill>
@@ -3892,14 +3892,14 @@
           <a:ln/>
         </p:spPr>
         <p:txBody>
-          <a:bodyPr wrap="square" lIns="0" tIns="0" rIns="0" bIns="0" rtlCol="0" anchor="ctr"/>
+          <a:bodyPr wrap="none" lIns="0" tIns="0" rIns="0" bIns="0" rtlCol="0" anchor="ctr"/>
           <a:lstStyle/>
           <a:p>
             <a:pPr algn="ctr" indent="0" marL="0">
               <a:buNone/>
             </a:pPr>
             <a:r>
-              <a:rPr lang="ja-JP" altLang="en-US" sz="1100" dirty="0">
+              <a:rPr lang="ja-JP" altLang="en-US" sz="1050" dirty="0">
                 <a:solidFill>
                   <a:srgbClr val="404040"/>
                 </a:solidFill>
@@ -3909,14 +3909,14 @@
               </a:rPr>
               <a:t>再クラ</a:t>
             </a:r>
-            <a:endParaRPr lang="ja-JP" sz="1100" dirty="0"/>
+            <a:endParaRPr lang="ja-JP" sz="1050" dirty="0"/>
           </a:p>
           <a:p>
             <a:pPr algn="ctr" indent="0" marL="0">
               <a:buNone/>
             </a:pPr>
             <a:r>
-              <a:rPr lang="ja-JP" altLang="en-US" sz="1100" dirty="0">
+              <a:rPr lang="ja-JP" altLang="en-US" sz="1050" dirty="0">
                 <a:solidFill>
                   <a:srgbClr val="404040"/>
                 </a:solidFill>
@@ -3926,7 +3926,7 @@
               </a:rPr>
               <a:t>ーレ化</a:t>
             </a:r>
-            <a:endParaRPr lang="ja-JP" sz="1100" dirty="0"/>
+            <a:endParaRPr lang="ja-JP" sz="1050" dirty="0"/>
           </a:p>
         </p:txBody>
       </p:sp>
@@ -3943,7 +3943,7 @@
           </a:xfrm>
           <a:prstGeom prst="roundRect">
             <a:avLst>
-              <a:gd name="adj" fmla="val 15625"/>
+              <a:gd name="adj" fmla="val 7813"/>
             </a:avLst>
           </a:prstGeom>
           <a:solidFill>
@@ -3952,14 +3952,14 @@
           <a:ln/>
         </p:spPr>
         <p:txBody>
-          <a:bodyPr wrap="square" lIns="0" tIns="0" rIns="0" bIns="0" rtlCol="0" anchor="ctr"/>
+          <a:bodyPr wrap="none" lIns="0" tIns="0" rIns="0" bIns="0" rtlCol="0" anchor="ctr"/>
           <a:lstStyle/>
           <a:p>
             <a:pPr algn="ctr" indent="0" marL="0">
               <a:buNone/>
             </a:pPr>
             <a:r>
-              <a:rPr lang="ja-JP" altLang="en-US" sz="1100" dirty="0">
+              <a:rPr lang="ja-JP" altLang="en-US" sz="1050" dirty="0">
                 <a:solidFill>
                   <a:srgbClr val="404040"/>
                 </a:solidFill>
@@ -3969,7 +3969,7 @@
               </a:rPr>
               <a:t>手順</a:t>
             </a:r>
-            <a:endParaRPr lang="ja-JP" sz="1100" dirty="0"/>
+            <a:endParaRPr lang="ja-JP" sz="1050" dirty="0"/>
           </a:p>
         </p:txBody>
       </p:sp>
@@ -4609,7 +4609,7 @@
           </a:xfrm>
           <a:prstGeom prst="roundRect">
             <a:avLst>
-              <a:gd name="adj" fmla="val 15625"/>
+              <a:gd name="adj" fmla="val 7813"/>
             </a:avLst>
           </a:prstGeom>
           <a:solidFill>
@@ -4618,14 +4618,14 @@
           <a:ln/>
         </p:spPr>
         <p:txBody>
-          <a:bodyPr wrap="square" lIns="0" tIns="0" rIns="0" bIns="0" rtlCol="0" anchor="ctr"/>
+          <a:bodyPr wrap="none" lIns="0" tIns="0" rIns="0" bIns="0" rtlCol="0" anchor="ctr"/>
           <a:lstStyle/>
           <a:p>
             <a:pPr algn="ctr" indent="0" marL="0">
               <a:buNone/>
             </a:pPr>
             <a:r>
-              <a:rPr lang="ja-JP" altLang="en-US" sz="1100" dirty="0">
+              <a:rPr lang="ja-JP" altLang="en-US" sz="1050" dirty="0">
                 <a:solidFill>
                   <a:srgbClr val="404040"/>
                 </a:solidFill>
@@ -4635,14 +4635,14 @@
               </a:rPr>
               <a:t>残存</a:t>
             </a:r>
-            <a:endParaRPr lang="ja-JP" sz="1100" dirty="0"/>
+            <a:endParaRPr lang="ja-JP" sz="1050" dirty="0"/>
           </a:p>
           <a:p>
             <a:pPr algn="ctr" indent="0" marL="0">
               <a:buNone/>
             </a:pPr>
             <a:r>
-              <a:rPr lang="ja-JP" altLang="en-US" sz="1100" dirty="0">
+              <a:rPr lang="ja-JP" altLang="en-US" sz="1050" dirty="0">
                 <a:solidFill>
                   <a:srgbClr val="404040"/>
                 </a:solidFill>
@@ -4652,7 +4652,7 @@
               </a:rPr>
               <a:t>筋弛緩</a:t>
             </a:r>
-            <a:endParaRPr lang="ja-JP" sz="1100" dirty="0"/>
+            <a:endParaRPr lang="ja-JP" sz="1050" dirty="0"/>
           </a:p>
         </p:txBody>
       </p:sp>
@@ -4669,7 +4669,7 @@
           </a:xfrm>
           <a:prstGeom prst="roundRect">
             <a:avLst>
-              <a:gd name="adj" fmla="val 15625"/>
+              <a:gd name="adj" fmla="val 7813"/>
             </a:avLst>
           </a:prstGeom>
           <a:solidFill>
@@ -4678,14 +4678,14 @@
           <a:ln/>
         </p:spPr>
         <p:txBody>
-          <a:bodyPr wrap="square" lIns="0" tIns="0" rIns="0" bIns="0" rtlCol="0" anchor="ctr"/>
+          <a:bodyPr wrap="none" lIns="0" tIns="0" rIns="0" bIns="0" rtlCol="0" anchor="ctr"/>
           <a:lstStyle/>
           <a:p>
             <a:pPr algn="ctr" indent="0" marL="0">
               <a:buNone/>
             </a:pPr>
             <a:r>
-              <a:rPr lang="ja-JP" altLang="en-US" sz="1100" b="1" dirty="0">
+              <a:rPr lang="ja-JP" altLang="en-US" sz="1050" b="1" dirty="0">
                 <a:solidFill>
                   <a:srgbClr val="FFFFFF"/>
                 </a:solidFill>
@@ -4695,14 +4695,14 @@
               </a:rPr>
               <a:t>スガマ</a:t>
             </a:r>
-            <a:endParaRPr lang="ja-JP" sz="1100" dirty="0"/>
+            <a:endParaRPr lang="ja-JP" sz="1050" dirty="0"/>
           </a:p>
           <a:p>
             <a:pPr algn="ctr" indent="0" marL="0">
               <a:buNone/>
             </a:pPr>
             <a:r>
-              <a:rPr lang="ja-JP" altLang="en-US" sz="1100" b="1" dirty="0">
+              <a:rPr lang="ja-JP" altLang="en-US" sz="1050" b="1" dirty="0">
                 <a:solidFill>
                   <a:srgbClr val="FFFFFF"/>
                 </a:solidFill>
@@ -4712,7 +4712,7 @@
               </a:rPr>
               <a:t>デクス</a:t>
             </a:r>
-            <a:endParaRPr lang="ja-JP" sz="1100" dirty="0"/>
+            <a:endParaRPr lang="ja-JP" sz="1050" dirty="0"/>
           </a:p>
         </p:txBody>
       </p:sp>
@@ -4729,7 +4729,7 @@
           </a:xfrm>
           <a:prstGeom prst="roundRect">
             <a:avLst>
-              <a:gd name="adj" fmla="val 15625"/>
+              <a:gd name="adj" fmla="val 7813"/>
             </a:avLst>
           </a:prstGeom>
           <a:solidFill>
@@ -4738,14 +4738,14 @@
           <a:ln/>
         </p:spPr>
         <p:txBody>
-          <a:bodyPr wrap="square" lIns="0" tIns="0" rIns="0" bIns="0" rtlCol="0" anchor="ctr"/>
+          <a:bodyPr wrap="none" lIns="0" tIns="0" rIns="0" bIns="0" rtlCol="0" anchor="ctr"/>
           <a:lstStyle/>
           <a:p>
             <a:pPr algn="ctr" indent="0" marL="0">
               <a:buNone/>
             </a:pPr>
             <a:r>
-              <a:rPr lang="ja-JP" altLang="en-US" sz="1100" dirty="0">
+              <a:rPr lang="ja-JP" altLang="en-US" sz="1050" dirty="0">
                 <a:solidFill>
                   <a:srgbClr val="404040"/>
                 </a:solidFill>
@@ -4755,14 +4755,14 @@
               </a:rPr>
               <a:t>ネオスチ</a:t>
             </a:r>
-            <a:endParaRPr lang="ja-JP" sz="1100" dirty="0"/>
+            <a:endParaRPr lang="ja-JP" sz="1050" dirty="0"/>
           </a:p>
           <a:p>
             <a:pPr algn="ctr" indent="0" marL="0">
               <a:buNone/>
             </a:pPr>
             <a:r>
-              <a:rPr lang="ja-JP" altLang="en-US" sz="1100" dirty="0">
+              <a:rPr lang="ja-JP" altLang="en-US" sz="1050" dirty="0">
                 <a:solidFill>
                   <a:srgbClr val="404040"/>
                 </a:solidFill>
@@ -4772,7 +4772,7 @@
               </a:rPr>
               <a:t>グミン</a:t>
             </a:r>
-            <a:endParaRPr lang="ja-JP" sz="1100" dirty="0"/>
+            <a:endParaRPr lang="ja-JP" sz="1050" dirty="0"/>
           </a:p>
         </p:txBody>
       </p:sp>
@@ -4789,7 +4789,7 @@
           </a:xfrm>
           <a:prstGeom prst="roundRect">
             <a:avLst>
-              <a:gd name="adj" fmla="val 15625"/>
+              <a:gd name="adj" fmla="val 7813"/>
             </a:avLst>
           </a:prstGeom>
           <a:solidFill>
@@ -4798,14 +4798,14 @@
           <a:ln/>
         </p:spPr>
         <p:txBody>
-          <a:bodyPr wrap="square" lIns="0" tIns="0" rIns="0" bIns="0" rtlCol="0" anchor="ctr"/>
+          <a:bodyPr wrap="none" lIns="0" tIns="0" rIns="0" bIns="0" rtlCol="0" anchor="ctr"/>
           <a:lstStyle/>
           <a:p>
             <a:pPr algn="ctr" indent="0" marL="0">
               <a:buNone/>
             </a:pPr>
             <a:r>
-              <a:rPr lang="ja-JP" altLang="en-US" sz="1100" dirty="0">
+              <a:rPr lang="ja-JP" altLang="en-US" sz="1050" dirty="0">
                 <a:solidFill>
                   <a:srgbClr val="404040"/>
                 </a:solidFill>
@@ -4815,14 +4815,14 @@
               </a:rPr>
               <a:t>再クラ</a:t>
             </a:r>
-            <a:endParaRPr lang="ja-JP" sz="1100" dirty="0"/>
+            <a:endParaRPr lang="ja-JP" sz="1050" dirty="0"/>
           </a:p>
           <a:p>
             <a:pPr algn="ctr" indent="0" marL="0">
               <a:buNone/>
             </a:pPr>
             <a:r>
-              <a:rPr lang="ja-JP" altLang="en-US" sz="1100" dirty="0">
+              <a:rPr lang="ja-JP" altLang="en-US" sz="1050" dirty="0">
                 <a:solidFill>
                   <a:srgbClr val="404040"/>
                 </a:solidFill>
@@ -4832,7 +4832,7 @@
               </a:rPr>
               <a:t>ーレ化</a:t>
             </a:r>
-            <a:endParaRPr lang="ja-JP" sz="1100" dirty="0"/>
+            <a:endParaRPr lang="ja-JP" sz="1050" dirty="0"/>
           </a:p>
         </p:txBody>
       </p:sp>
@@ -4849,7 +4849,7 @@
           </a:xfrm>
           <a:prstGeom prst="roundRect">
             <a:avLst>
-              <a:gd name="adj" fmla="val 15625"/>
+              <a:gd name="adj" fmla="val 7813"/>
             </a:avLst>
           </a:prstGeom>
           <a:solidFill>
@@ -4858,14 +4858,14 @@
           <a:ln/>
         </p:spPr>
         <p:txBody>
-          <a:bodyPr wrap="square" lIns="0" tIns="0" rIns="0" bIns="0" rtlCol="0" anchor="ctr"/>
+          <a:bodyPr wrap="none" lIns="0" tIns="0" rIns="0" bIns="0" rtlCol="0" anchor="ctr"/>
           <a:lstStyle/>
           <a:p>
             <a:pPr algn="ctr" indent="0" marL="0">
               <a:buNone/>
             </a:pPr>
             <a:r>
-              <a:rPr lang="ja-JP" altLang="en-US" sz="1100" dirty="0">
+              <a:rPr lang="ja-JP" altLang="en-US" sz="1050" dirty="0">
                 <a:solidFill>
                   <a:srgbClr val="404040"/>
                 </a:solidFill>
@@ -4875,7 +4875,7 @@
               </a:rPr>
               <a:t>手順</a:t>
             </a:r>
-            <a:endParaRPr lang="ja-JP" sz="1100" dirty="0"/>
+            <a:endParaRPr lang="ja-JP" sz="1050" dirty="0"/>
           </a:p>
         </p:txBody>
       </p:sp>
@@ -5940,7 +5940,7 @@
           </a:xfrm>
           <a:prstGeom prst="roundRect">
             <a:avLst>
-              <a:gd name="adj" fmla="val 15625"/>
+              <a:gd name="adj" fmla="val 7813"/>
             </a:avLst>
           </a:prstGeom>
           <a:solidFill>
@@ -5949,14 +5949,14 @@
           <a:ln/>
         </p:spPr>
         <p:txBody>
-          <a:bodyPr wrap="square" lIns="0" tIns="0" rIns="0" bIns="0" rtlCol="0" anchor="ctr"/>
+          <a:bodyPr wrap="none" lIns="0" tIns="0" rIns="0" bIns="0" rtlCol="0" anchor="ctr"/>
           <a:lstStyle/>
           <a:p>
             <a:pPr algn="ctr" indent="0" marL="0">
               <a:buNone/>
             </a:pPr>
             <a:r>
-              <a:rPr lang="ja-JP" altLang="en-US" sz="1100" dirty="0">
+              <a:rPr lang="ja-JP" altLang="en-US" sz="1050" dirty="0">
                 <a:solidFill>
                   <a:srgbClr val="404040"/>
                 </a:solidFill>
@@ -5966,14 +5966,14 @@
               </a:rPr>
               <a:t>残存</a:t>
             </a:r>
-            <a:endParaRPr lang="ja-JP" sz="1100" dirty="0"/>
+            <a:endParaRPr lang="ja-JP" sz="1050" dirty="0"/>
           </a:p>
           <a:p>
             <a:pPr algn="ctr" indent="0" marL="0">
               <a:buNone/>
             </a:pPr>
             <a:r>
-              <a:rPr lang="ja-JP" altLang="en-US" sz="1100" dirty="0">
+              <a:rPr lang="ja-JP" altLang="en-US" sz="1050" dirty="0">
                 <a:solidFill>
                   <a:srgbClr val="404040"/>
                 </a:solidFill>
@@ -5983,7 +5983,7 @@
               </a:rPr>
               <a:t>筋弛緩</a:t>
             </a:r>
-            <a:endParaRPr lang="ja-JP" sz="1100" dirty="0"/>
+            <a:endParaRPr lang="ja-JP" sz="1050" dirty="0"/>
           </a:p>
         </p:txBody>
       </p:sp>
@@ -6000,7 +6000,7 @@
           </a:xfrm>
           <a:prstGeom prst="roundRect">
             <a:avLst>
-              <a:gd name="adj" fmla="val 15625"/>
+              <a:gd name="adj" fmla="val 7813"/>
             </a:avLst>
           </a:prstGeom>
           <a:solidFill>
@@ -6009,14 +6009,14 @@
           <a:ln/>
         </p:spPr>
         <p:txBody>
-          <a:bodyPr wrap="square" lIns="0" tIns="0" rIns="0" bIns="0" rtlCol="0" anchor="ctr"/>
+          <a:bodyPr wrap="none" lIns="0" tIns="0" rIns="0" bIns="0" rtlCol="0" anchor="ctr"/>
           <a:lstStyle/>
           <a:p>
             <a:pPr algn="ctr" indent="0" marL="0">
               <a:buNone/>
             </a:pPr>
             <a:r>
-              <a:rPr lang="ja-JP" altLang="en-US" sz="1100" dirty="0">
+              <a:rPr lang="ja-JP" altLang="en-US" sz="1050" dirty="0">
                 <a:solidFill>
                   <a:srgbClr val="404040"/>
                 </a:solidFill>
@@ -6026,14 +6026,14 @@
               </a:rPr>
               <a:t>スガマ</a:t>
             </a:r>
-            <a:endParaRPr lang="ja-JP" sz="1100" dirty="0"/>
+            <a:endParaRPr lang="ja-JP" sz="1050" dirty="0"/>
           </a:p>
           <a:p>
             <a:pPr algn="ctr" indent="0" marL="0">
               <a:buNone/>
             </a:pPr>
             <a:r>
-              <a:rPr lang="ja-JP" altLang="en-US" sz="1100" dirty="0">
+              <a:rPr lang="ja-JP" altLang="en-US" sz="1050" dirty="0">
                 <a:solidFill>
                   <a:srgbClr val="404040"/>
                 </a:solidFill>
@@ -6043,7 +6043,7 @@
               </a:rPr>
               <a:t>デクス</a:t>
             </a:r>
-            <a:endParaRPr lang="ja-JP" sz="1100" dirty="0"/>
+            <a:endParaRPr lang="ja-JP" sz="1050" dirty="0"/>
           </a:p>
         </p:txBody>
       </p:sp>
@@ -6060,7 +6060,7 @@
           </a:xfrm>
           <a:prstGeom prst="roundRect">
             <a:avLst>
-              <a:gd name="adj" fmla="val 15625"/>
+              <a:gd name="adj" fmla="val 7813"/>
             </a:avLst>
           </a:prstGeom>
           <a:solidFill>
@@ -6069,14 +6069,14 @@
           <a:ln/>
         </p:spPr>
         <p:txBody>
-          <a:bodyPr wrap="square" lIns="0" tIns="0" rIns="0" bIns="0" rtlCol="0" anchor="ctr"/>
+          <a:bodyPr wrap="none" lIns="0" tIns="0" rIns="0" bIns="0" rtlCol="0" anchor="ctr"/>
           <a:lstStyle/>
           <a:p>
             <a:pPr algn="ctr" indent="0" marL="0">
               <a:buNone/>
             </a:pPr>
             <a:r>
-              <a:rPr lang="ja-JP" altLang="en-US" sz="1100" b="1" dirty="0">
+              <a:rPr lang="ja-JP" altLang="en-US" sz="1050" b="1" dirty="0">
                 <a:solidFill>
                   <a:srgbClr val="FFFFFF"/>
                 </a:solidFill>
@@ -6086,14 +6086,14 @@
               </a:rPr>
               <a:t>ネオスチ</a:t>
             </a:r>
-            <a:endParaRPr lang="ja-JP" sz="1100" dirty="0"/>
+            <a:endParaRPr lang="ja-JP" sz="1050" dirty="0"/>
           </a:p>
           <a:p>
             <a:pPr algn="ctr" indent="0" marL="0">
               <a:buNone/>
             </a:pPr>
             <a:r>
-              <a:rPr lang="ja-JP" altLang="en-US" sz="1100" b="1" dirty="0">
+              <a:rPr lang="ja-JP" altLang="en-US" sz="1050" b="1" dirty="0">
                 <a:solidFill>
                   <a:srgbClr val="FFFFFF"/>
                 </a:solidFill>
@@ -6103,7 +6103,7 @@
               </a:rPr>
               <a:t>グミン</a:t>
             </a:r>
-            <a:endParaRPr lang="ja-JP" sz="1100" dirty="0"/>
+            <a:endParaRPr lang="ja-JP" sz="1050" dirty="0"/>
           </a:p>
         </p:txBody>
       </p:sp>
@@ -6120,7 +6120,7 @@
           </a:xfrm>
           <a:prstGeom prst="roundRect">
             <a:avLst>
-              <a:gd name="adj" fmla="val 15625"/>
+              <a:gd name="adj" fmla="val 7813"/>
             </a:avLst>
           </a:prstGeom>
           <a:solidFill>
@@ -6129,14 +6129,14 @@
           <a:ln/>
         </p:spPr>
         <p:txBody>
-          <a:bodyPr wrap="square" lIns="0" tIns="0" rIns="0" bIns="0" rtlCol="0" anchor="ctr"/>
+          <a:bodyPr wrap="none" lIns="0" tIns="0" rIns="0" bIns="0" rtlCol="0" anchor="ctr"/>
           <a:lstStyle/>
           <a:p>
             <a:pPr algn="ctr" indent="0" marL="0">
               <a:buNone/>
             </a:pPr>
             <a:r>
-              <a:rPr lang="ja-JP" altLang="en-US" sz="1100" dirty="0">
+              <a:rPr lang="ja-JP" altLang="en-US" sz="1050" dirty="0">
                 <a:solidFill>
                   <a:srgbClr val="404040"/>
                 </a:solidFill>
@@ -6146,14 +6146,14 @@
               </a:rPr>
               <a:t>再クラ</a:t>
             </a:r>
-            <a:endParaRPr lang="ja-JP" sz="1100" dirty="0"/>
+            <a:endParaRPr lang="ja-JP" sz="1050" dirty="0"/>
           </a:p>
           <a:p>
             <a:pPr algn="ctr" indent="0" marL="0">
               <a:buNone/>
             </a:pPr>
             <a:r>
-              <a:rPr lang="ja-JP" altLang="en-US" sz="1100" dirty="0">
+              <a:rPr lang="ja-JP" altLang="en-US" sz="1050" dirty="0">
                 <a:solidFill>
                   <a:srgbClr val="404040"/>
                 </a:solidFill>
@@ -6163,7 +6163,7 @@
               </a:rPr>
               <a:t>ーレ化</a:t>
             </a:r>
-            <a:endParaRPr lang="ja-JP" sz="1100" dirty="0"/>
+            <a:endParaRPr lang="ja-JP" sz="1050" dirty="0"/>
           </a:p>
         </p:txBody>
       </p:sp>
@@ -6180,7 +6180,7 @@
           </a:xfrm>
           <a:prstGeom prst="roundRect">
             <a:avLst>
-              <a:gd name="adj" fmla="val 15625"/>
+              <a:gd name="adj" fmla="val 7813"/>
             </a:avLst>
           </a:prstGeom>
           <a:solidFill>
@@ -6189,14 +6189,14 @@
           <a:ln/>
         </p:spPr>
         <p:txBody>
-          <a:bodyPr wrap="square" lIns="0" tIns="0" rIns="0" bIns="0" rtlCol="0" anchor="ctr"/>
+          <a:bodyPr wrap="none" lIns="0" tIns="0" rIns="0" bIns="0" rtlCol="0" anchor="ctr"/>
           <a:lstStyle/>
           <a:p>
             <a:pPr algn="ctr" indent="0" marL="0">
               <a:buNone/>
             </a:pPr>
             <a:r>
-              <a:rPr lang="ja-JP" altLang="en-US" sz="1100" dirty="0">
+              <a:rPr lang="ja-JP" altLang="en-US" sz="1050" dirty="0">
                 <a:solidFill>
                   <a:srgbClr val="404040"/>
                 </a:solidFill>
@@ -6206,7 +6206,7 @@
               </a:rPr>
               <a:t>手順</a:t>
             </a:r>
-            <a:endParaRPr lang="ja-JP" sz="1100" dirty="0"/>
+            <a:endParaRPr lang="ja-JP" sz="1050" dirty="0"/>
           </a:p>
         </p:txBody>
       </p:sp>
@@ -6625,11 +6625,11 @@
         <p:spPr>
           <a:xfrm>
             <a:off x="5654467" y="1691640"/>
-            <a:ext cx="3073298" cy="4032504"/>
+            <a:ext cx="3386226" cy="4032504"/>
           </a:xfrm>
           <a:prstGeom prst="roundRect">
             <a:avLst>
-              <a:gd name="adj" fmla="val 2380"/>
+              <a:gd name="adj" fmla="val 2160"/>
             </a:avLst>
           </a:prstGeom>
           <a:solidFill>
@@ -6647,7 +6647,7 @@
         <p:spPr>
           <a:xfrm>
             <a:off x="5782483" y="1837944"/>
-            <a:ext cx="2817266" cy="457200"/>
+            <a:ext cx="3130194" cy="457200"/>
           </a:xfrm>
           <a:prstGeom prst="rect">
             <a:avLst/>
@@ -6686,7 +6686,7 @@
         <p:spPr>
           <a:xfrm>
             <a:off x="5782483" y="2441448"/>
-            <a:ext cx="2817266" cy="420624"/>
+            <a:ext cx="3130194" cy="420624"/>
           </a:xfrm>
           <a:prstGeom prst="rect">
             <a:avLst/>
@@ -6710,7 +6710,7 @@
                 <a:ea typeface="メイリオ" pitchFamily="34" charset="-122"/>
                 <a:cs typeface="メイリオ" pitchFamily="34" charset="-120"/>
               </a:rPr>
-              <a:t>コリンエステラーゼ</a:t>
+              <a:t>コリンエステラーゼを</a:t>
             </a:r>
             <a:endParaRPr lang="ja-JP" sz="2200" dirty="0"/>
           </a:p>
@@ -6725,7 +6725,7 @@
         <p:spPr>
           <a:xfrm>
             <a:off x="6056803" y="2862072"/>
-            <a:ext cx="2542946" cy="420624"/>
+            <a:ext cx="2855874" cy="420624"/>
           </a:xfrm>
           <a:prstGeom prst="rect">
             <a:avLst/>
@@ -6749,7 +6749,7 @@
                 <a:ea typeface="メイリオ" pitchFamily="34" charset="-122"/>
                 <a:cs typeface="メイリオ" pitchFamily="34" charset="-120"/>
               </a:rPr>
-              <a:t>を阻害</a:t>
+              <a:t>阻害</a:t>
             </a:r>
             <a:endParaRPr lang="ja-JP" sz="2200" dirty="0"/>
           </a:p>
@@ -6764,7 +6764,7 @@
         <p:spPr>
           <a:xfrm>
             <a:off x="5782483" y="3593592"/>
-            <a:ext cx="2817266" cy="420624"/>
+            <a:ext cx="3130194" cy="420624"/>
           </a:xfrm>
           <a:prstGeom prst="rect">
             <a:avLst/>
@@ -6803,7 +6803,7 @@
         <p:spPr>
           <a:xfrm>
             <a:off x="6056803" y="4014216"/>
-            <a:ext cx="2542946" cy="420624"/>
+            <a:ext cx="2855874" cy="420624"/>
           </a:xfrm>
           <a:prstGeom prst="rect">
             <a:avLst/>
@@ -6842,7 +6842,7 @@
         <p:spPr>
           <a:xfrm>
             <a:off x="5782483" y="4745736"/>
-            <a:ext cx="2817266" cy="420624"/>
+            <a:ext cx="3130194" cy="420624"/>
           </a:xfrm>
           <a:prstGeom prst="rect">
             <a:avLst/>
@@ -6880,12 +6880,12 @@
         </p:nvSpPr>
         <p:spPr>
           <a:xfrm>
-            <a:off x="8947221" y="1691640"/>
-            <a:ext cx="2738811" cy="4032504"/>
+            <a:off x="9260149" y="1691640"/>
+            <a:ext cx="2425883" cy="4032504"/>
           </a:xfrm>
           <a:prstGeom prst="roundRect">
             <a:avLst>
-              <a:gd name="adj" fmla="val 2671"/>
+              <a:gd name="adj" fmla="val 3015"/>
             </a:avLst>
           </a:prstGeom>
           <a:solidFill>
@@ -6902,8 +6902,8 @@
         </p:nvSpPr>
         <p:spPr>
           <a:xfrm>
-            <a:off x="9075237" y="1837944"/>
-            <a:ext cx="2482779" cy="457200"/>
+            <a:off x="9388165" y="1837944"/>
+            <a:ext cx="2169851" cy="457200"/>
           </a:xfrm>
           <a:prstGeom prst="rect">
             <a:avLst/>
@@ -6941,8 +6941,8 @@
         </p:nvSpPr>
         <p:spPr>
           <a:xfrm>
-            <a:off x="9075237" y="2441448"/>
-            <a:ext cx="2482779" cy="420624"/>
+            <a:off x="9388165" y="2441448"/>
+            <a:ext cx="2169851" cy="420624"/>
           </a:xfrm>
           <a:prstGeom prst="rect">
             <a:avLst/>
@@ -6980,8 +6980,8 @@
         </p:nvSpPr>
         <p:spPr>
           <a:xfrm>
-            <a:off x="9349557" y="2862072"/>
-            <a:ext cx="2208459" cy="420624"/>
+            <a:off x="9662485" y="2862072"/>
+            <a:ext cx="1895531" cy="420624"/>
           </a:xfrm>
           <a:prstGeom prst="rect">
             <a:avLst/>
@@ -7019,8 +7019,8 @@
         </p:nvSpPr>
         <p:spPr>
           <a:xfrm>
-            <a:off x="9075237" y="3589020"/>
-            <a:ext cx="2482779" cy="420624"/>
+            <a:off x="9388165" y="3589020"/>
+            <a:ext cx="2169851" cy="420624"/>
           </a:xfrm>
           <a:prstGeom prst="rect">
             <a:avLst/>
@@ -7058,8 +7058,8 @@
         </p:nvSpPr>
         <p:spPr>
           <a:xfrm>
-            <a:off x="9349557" y="4009644"/>
-            <a:ext cx="2208459" cy="420624"/>
+            <a:off x="9662485" y="4009644"/>
+            <a:ext cx="1895531" cy="420624"/>
           </a:xfrm>
           <a:prstGeom prst="rect">
             <a:avLst/>
@@ -7097,8 +7097,8 @@
         </p:nvSpPr>
         <p:spPr>
           <a:xfrm>
-            <a:off x="9075237" y="4736592"/>
-            <a:ext cx="2482779" cy="420624"/>
+            <a:off x="9388165" y="4736592"/>
+            <a:ext cx="2169851" cy="420624"/>
           </a:xfrm>
           <a:prstGeom prst="rect">
             <a:avLst/>
@@ -7136,8 +7136,8 @@
         </p:nvSpPr>
         <p:spPr>
           <a:xfrm>
-            <a:off x="9349557" y="5157216"/>
-            <a:ext cx="2208459" cy="420624"/>
+            <a:off x="9662485" y="5157216"/>
+            <a:ext cx="1895531" cy="420624"/>
           </a:xfrm>
           <a:prstGeom prst="rect">
             <a:avLst/>
@@ -7276,7 +7276,7 @@
           </a:xfrm>
           <a:prstGeom prst="roundRect">
             <a:avLst>
-              <a:gd name="adj" fmla="val 15625"/>
+              <a:gd name="adj" fmla="val 7813"/>
             </a:avLst>
           </a:prstGeom>
           <a:solidFill>
@@ -7285,14 +7285,14 @@
           <a:ln/>
         </p:spPr>
         <p:txBody>
-          <a:bodyPr wrap="square" lIns="0" tIns="0" rIns="0" bIns="0" rtlCol="0" anchor="ctr"/>
+          <a:bodyPr wrap="none" lIns="0" tIns="0" rIns="0" bIns="0" rtlCol="0" anchor="ctr"/>
           <a:lstStyle/>
           <a:p>
             <a:pPr algn="ctr" indent="0" marL="0">
               <a:buNone/>
             </a:pPr>
             <a:r>
-              <a:rPr lang="ja-JP" altLang="en-US" sz="1100" dirty="0">
+              <a:rPr lang="ja-JP" altLang="en-US" sz="1050" dirty="0">
                 <a:solidFill>
                   <a:srgbClr val="404040"/>
                 </a:solidFill>
@@ -7302,14 +7302,14 @@
               </a:rPr>
               <a:t>残存</a:t>
             </a:r>
-            <a:endParaRPr lang="ja-JP" sz="1100" dirty="0"/>
+            <a:endParaRPr lang="ja-JP" sz="1050" dirty="0"/>
           </a:p>
           <a:p>
             <a:pPr algn="ctr" indent="0" marL="0">
               <a:buNone/>
             </a:pPr>
             <a:r>
-              <a:rPr lang="ja-JP" altLang="en-US" sz="1100" dirty="0">
+              <a:rPr lang="ja-JP" altLang="en-US" sz="1050" dirty="0">
                 <a:solidFill>
                   <a:srgbClr val="404040"/>
                 </a:solidFill>
@@ -7319,7 +7319,7 @@
               </a:rPr>
               <a:t>筋弛緩</a:t>
             </a:r>
-            <a:endParaRPr lang="ja-JP" sz="1100" dirty="0"/>
+            <a:endParaRPr lang="ja-JP" sz="1050" dirty="0"/>
           </a:p>
         </p:txBody>
       </p:sp>
@@ -7336,7 +7336,7 @@
           </a:xfrm>
           <a:prstGeom prst="roundRect">
             <a:avLst>
-              <a:gd name="adj" fmla="val 15625"/>
+              <a:gd name="adj" fmla="val 7813"/>
             </a:avLst>
           </a:prstGeom>
           <a:solidFill>
@@ -7345,14 +7345,14 @@
           <a:ln/>
         </p:spPr>
         <p:txBody>
-          <a:bodyPr wrap="square" lIns="0" tIns="0" rIns="0" bIns="0" rtlCol="0" anchor="ctr"/>
+          <a:bodyPr wrap="none" lIns="0" tIns="0" rIns="0" bIns="0" rtlCol="0" anchor="ctr"/>
           <a:lstStyle/>
           <a:p>
             <a:pPr algn="ctr" indent="0" marL="0">
               <a:buNone/>
             </a:pPr>
             <a:r>
-              <a:rPr lang="ja-JP" altLang="en-US" sz="1100" dirty="0">
+              <a:rPr lang="ja-JP" altLang="en-US" sz="1050" dirty="0">
                 <a:solidFill>
                   <a:srgbClr val="404040"/>
                 </a:solidFill>
@@ -7362,14 +7362,14 @@
               </a:rPr>
               <a:t>スガマ</a:t>
             </a:r>
-            <a:endParaRPr lang="ja-JP" sz="1100" dirty="0"/>
+            <a:endParaRPr lang="ja-JP" sz="1050" dirty="0"/>
           </a:p>
           <a:p>
             <a:pPr algn="ctr" indent="0" marL="0">
               <a:buNone/>
             </a:pPr>
             <a:r>
-              <a:rPr lang="ja-JP" altLang="en-US" sz="1100" dirty="0">
+              <a:rPr lang="ja-JP" altLang="en-US" sz="1050" dirty="0">
                 <a:solidFill>
                   <a:srgbClr val="404040"/>
                 </a:solidFill>
@@ -7379,7 +7379,7 @@
               </a:rPr>
               <a:t>デクス</a:t>
             </a:r>
-            <a:endParaRPr lang="ja-JP" sz="1100" dirty="0"/>
+            <a:endParaRPr lang="ja-JP" sz="1050" dirty="0"/>
           </a:p>
         </p:txBody>
       </p:sp>
@@ -7396,7 +7396,7 @@
           </a:xfrm>
           <a:prstGeom prst="roundRect">
             <a:avLst>
-              <a:gd name="adj" fmla="val 15625"/>
+              <a:gd name="adj" fmla="val 7813"/>
             </a:avLst>
           </a:prstGeom>
           <a:solidFill>
@@ -7405,14 +7405,14 @@
           <a:ln/>
         </p:spPr>
         <p:txBody>
-          <a:bodyPr wrap="square" lIns="0" tIns="0" rIns="0" bIns="0" rtlCol="0" anchor="ctr"/>
+          <a:bodyPr wrap="none" lIns="0" tIns="0" rIns="0" bIns="0" rtlCol="0" anchor="ctr"/>
           <a:lstStyle/>
           <a:p>
             <a:pPr algn="ctr" indent="0" marL="0">
               <a:buNone/>
             </a:pPr>
             <a:r>
-              <a:rPr lang="ja-JP" altLang="en-US" sz="1100" b="1" dirty="0">
+              <a:rPr lang="ja-JP" altLang="en-US" sz="1050" b="1" dirty="0">
                 <a:solidFill>
                   <a:srgbClr val="FFFFFF"/>
                 </a:solidFill>
@@ -7422,14 +7422,14 @@
               </a:rPr>
               <a:t>ネオスチ</a:t>
             </a:r>
-            <a:endParaRPr lang="ja-JP" sz="1100" dirty="0"/>
+            <a:endParaRPr lang="ja-JP" sz="1050" dirty="0"/>
           </a:p>
           <a:p>
             <a:pPr algn="ctr" indent="0" marL="0">
               <a:buNone/>
             </a:pPr>
             <a:r>
-              <a:rPr lang="ja-JP" altLang="en-US" sz="1100" b="1" dirty="0">
+              <a:rPr lang="ja-JP" altLang="en-US" sz="1050" b="1" dirty="0">
                 <a:solidFill>
                   <a:srgbClr val="FFFFFF"/>
                 </a:solidFill>
@@ -7439,7 +7439,7 @@
               </a:rPr>
               <a:t>グミン</a:t>
             </a:r>
-            <a:endParaRPr lang="ja-JP" sz="1100" dirty="0"/>
+            <a:endParaRPr lang="ja-JP" sz="1050" dirty="0"/>
           </a:p>
         </p:txBody>
       </p:sp>
@@ -7456,7 +7456,7 @@
           </a:xfrm>
           <a:prstGeom prst="roundRect">
             <a:avLst>
-              <a:gd name="adj" fmla="val 15625"/>
+              <a:gd name="adj" fmla="val 7813"/>
             </a:avLst>
           </a:prstGeom>
           <a:solidFill>
@@ -7465,14 +7465,14 @@
           <a:ln/>
         </p:spPr>
         <p:txBody>
-          <a:bodyPr wrap="square" lIns="0" tIns="0" rIns="0" bIns="0" rtlCol="0" anchor="ctr"/>
+          <a:bodyPr wrap="none" lIns="0" tIns="0" rIns="0" bIns="0" rtlCol="0" anchor="ctr"/>
           <a:lstStyle/>
           <a:p>
             <a:pPr algn="ctr" indent="0" marL="0">
               <a:buNone/>
             </a:pPr>
             <a:r>
-              <a:rPr lang="ja-JP" altLang="en-US" sz="1100" dirty="0">
+              <a:rPr lang="ja-JP" altLang="en-US" sz="1050" dirty="0">
                 <a:solidFill>
                   <a:srgbClr val="404040"/>
                 </a:solidFill>
@@ -7482,14 +7482,14 @@
               </a:rPr>
               <a:t>再クラ</a:t>
             </a:r>
-            <a:endParaRPr lang="ja-JP" sz="1100" dirty="0"/>
+            <a:endParaRPr lang="ja-JP" sz="1050" dirty="0"/>
           </a:p>
           <a:p>
             <a:pPr algn="ctr" indent="0" marL="0">
               <a:buNone/>
             </a:pPr>
             <a:r>
-              <a:rPr lang="ja-JP" altLang="en-US" sz="1100" dirty="0">
+              <a:rPr lang="ja-JP" altLang="en-US" sz="1050" dirty="0">
                 <a:solidFill>
                   <a:srgbClr val="404040"/>
                 </a:solidFill>
@@ -7499,7 +7499,7 @@
               </a:rPr>
               <a:t>ーレ化</a:t>
             </a:r>
-            <a:endParaRPr lang="ja-JP" sz="1100" dirty="0"/>
+            <a:endParaRPr lang="ja-JP" sz="1050" dirty="0"/>
           </a:p>
         </p:txBody>
       </p:sp>
@@ -7516,7 +7516,7 @@
           </a:xfrm>
           <a:prstGeom prst="roundRect">
             <a:avLst>
-              <a:gd name="adj" fmla="val 15625"/>
+              <a:gd name="adj" fmla="val 7813"/>
             </a:avLst>
           </a:prstGeom>
           <a:solidFill>
@@ -7525,14 +7525,14 @@
           <a:ln/>
         </p:spPr>
         <p:txBody>
-          <a:bodyPr wrap="square" lIns="0" tIns="0" rIns="0" bIns="0" rtlCol="0" anchor="ctr"/>
+          <a:bodyPr wrap="none" lIns="0" tIns="0" rIns="0" bIns="0" rtlCol="0" anchor="ctr"/>
           <a:lstStyle/>
           <a:p>
             <a:pPr algn="ctr" indent="0" marL="0">
               <a:buNone/>
             </a:pPr>
             <a:r>
-              <a:rPr lang="ja-JP" altLang="en-US" sz="1100" dirty="0">
+              <a:rPr lang="ja-JP" altLang="en-US" sz="1050" dirty="0">
                 <a:solidFill>
                   <a:srgbClr val="404040"/>
                 </a:solidFill>
@@ -7542,7 +7542,7 @@
               </a:rPr>
               <a:t>手順</a:t>
             </a:r>
-            <a:endParaRPr lang="ja-JP" sz="1100" dirty="0"/>
+            <a:endParaRPr lang="ja-JP" sz="1050" dirty="0"/>
           </a:p>
         </p:txBody>
       </p:sp>
@@ -7664,10 +7664,10 @@
             <a:tbl>
               <a:tblPr/>
               <a:tblGrid>
-                <a:gridCol w="1161288"/>
-                <a:gridCol w="3383280"/>
-                <a:gridCol w="3602736"/>
-                <a:gridCol w="3035808"/>
+                <a:gridCol w="1097280"/>
+                <a:gridCol w="3557016"/>
+                <a:gridCol w="3557016"/>
+                <a:gridCol w="2971800"/>
               </a:tblGrid>
               <a:tr h="566928">
                 <a:tc>
@@ -7696,7 +7696,7 @@
                       </a:endParaRPr>
                     </a:p>
                   </a:txBody>
-                  <a:tcPr marL="101600" marR="101600" marT="50800" marB="50800" anchor="ctr">
+                  <a:tcPr marL="76200" marR="76200" marT="50800" marB="50800" anchor="ctr">
                     <a:lnL w="12700" cap="flat" cmpd="sng" algn="ctr">
                       <a:solidFill>
                         <a:srgbClr val="BFBFBF"/>
@@ -7764,7 +7764,7 @@
                       </a:endParaRPr>
                     </a:p>
                   </a:txBody>
-                  <a:tcPr marL="101600" marR="101600" marT="50800" marB="50800" anchor="ctr">
+                  <a:tcPr marL="76200" marR="76200" marT="50800" marB="50800" anchor="ctr">
                     <a:lnL w="12700" cap="flat" cmpd="sng" algn="ctr">
                       <a:solidFill>
                         <a:srgbClr val="BFBFBF"/>
@@ -7832,7 +7832,7 @@
                       </a:endParaRPr>
                     </a:p>
                   </a:txBody>
-                  <a:tcPr marL="101600" marR="101600" marT="50800" marB="50800" anchor="ctr">
+                  <a:tcPr marL="76200" marR="76200" marT="50800" marB="50800" anchor="ctr">
                     <a:lnL w="12700" cap="flat" cmpd="sng" algn="ctr">
                       <a:solidFill>
                         <a:srgbClr val="BFBFBF"/>
@@ -7900,7 +7900,7 @@
                       </a:endParaRPr>
                     </a:p>
                   </a:txBody>
-                  <a:tcPr marL="101600" marR="101600" marT="50800" marB="50800" anchor="ctr">
+                  <a:tcPr marL="76200" marR="76200" marT="50800" marB="50800" anchor="ctr">
                     <a:lnL w="12700" cap="flat" cmpd="sng" algn="ctr">
                       <a:solidFill>
                         <a:srgbClr val="BFBFBF"/>
@@ -7970,7 +7970,7 @@
                       </a:endParaRPr>
                     </a:p>
                   </a:txBody>
-                  <a:tcPr marL="101600" marR="101600" marT="50800" marB="50800" anchor="ctr">
+                  <a:tcPr marL="76200" marR="76200" marT="50800" marB="50800" anchor="ctr">
                     <a:lnL w="12700" cap="flat" cmpd="sng" algn="ctr">
                       <a:solidFill>
                         <a:srgbClr val="BFBFBF"/>
@@ -8035,7 +8035,7 @@
                       </a:endParaRPr>
                     </a:p>
                   </a:txBody>
-                  <a:tcPr marL="101600" marR="101600" marT="50800" marB="50800" anchor="ctr">
+                  <a:tcPr marL="76200" marR="76200" marT="50800" marB="50800" anchor="ctr">
                     <a:lnL w="12700" cap="flat" cmpd="sng" algn="ctr">
                       <a:solidFill>
                         <a:srgbClr val="BFBFBF"/>
@@ -8100,7 +8100,7 @@
                       </a:endParaRPr>
                     </a:p>
                   </a:txBody>
-                  <a:tcPr marL="101600" marR="101600" marT="50800" marB="50800" anchor="ctr">
+                  <a:tcPr marL="76200" marR="76200" marT="50800" marB="50800" anchor="ctr">
                     <a:lnL w="12700" cap="flat" cmpd="sng" algn="ctr">
                       <a:solidFill>
                         <a:srgbClr val="BFBFBF"/>
@@ -8165,7 +8165,7 @@
                       </a:endParaRPr>
                     </a:p>
                   </a:txBody>
-                  <a:tcPr marL="101600" marR="101600" marT="50800" marB="50800" anchor="ctr">
+                  <a:tcPr marL="76200" marR="76200" marT="50800" marB="50800" anchor="ctr">
                     <a:lnL w="12700" cap="flat" cmpd="sng" algn="ctr">
                       <a:solidFill>
                         <a:srgbClr val="BFBFBF"/>
@@ -8232,7 +8232,7 @@
                       </a:endParaRPr>
                     </a:p>
                   </a:txBody>
-                  <a:tcPr marL="101600" marR="101600" marT="50800" marB="50800" anchor="ctr">
+                  <a:tcPr marL="76200" marR="76200" marT="50800" marB="50800" anchor="ctr">
                     <a:lnL w="12700" cap="flat" cmpd="sng" algn="ctr">
                       <a:solidFill>
                         <a:srgbClr val="BFBFBF"/>
@@ -8297,7 +8297,7 @@
                       </a:endParaRPr>
                     </a:p>
                   </a:txBody>
-                  <a:tcPr marL="101600" marR="101600" marT="50800" marB="50800" anchor="ctr">
+                  <a:tcPr marL="76200" marR="76200" marT="50800" marB="50800" anchor="ctr">
                     <a:lnL w="12700" cap="flat" cmpd="sng" algn="ctr">
                       <a:solidFill>
                         <a:srgbClr val="BFBFBF"/>
@@ -8383,7 +8383,7 @@
                       </a:endParaRPr>
                     </a:p>
                   </a:txBody>
-                  <a:tcPr marL="101600" marR="101600" marT="50800" marB="50800" anchor="ctr">
+                  <a:tcPr marL="76200" marR="76200" marT="50800" marB="50800" anchor="ctr">
                     <a:lnL w="12700" cap="flat" cmpd="sng" algn="ctr">
                       <a:solidFill>
                         <a:srgbClr val="BFBFBF"/>
@@ -8469,7 +8469,7 @@
                       </a:endParaRPr>
                     </a:p>
                   </a:txBody>
-                  <a:tcPr marL="101600" marR="101600" marT="50800" marB="50800" anchor="ctr">
+                  <a:tcPr marL="76200" marR="76200" marT="50800" marB="50800" anchor="ctr">
                     <a:lnL w="12700" cap="flat" cmpd="sng" algn="ctr">
                       <a:solidFill>
                         <a:srgbClr val="BFBFBF"/>
@@ -8536,7 +8536,7 @@
                       </a:endParaRPr>
                     </a:p>
                   </a:txBody>
-                  <a:tcPr marL="101600" marR="101600" marT="50800" marB="50800" anchor="ctr">
+                  <a:tcPr marL="76200" marR="76200" marT="50800" marB="50800" anchor="ctr">
                     <a:lnL w="12700" cap="flat" cmpd="sng" algn="ctr">
                       <a:solidFill>
                         <a:srgbClr val="BFBFBF"/>
@@ -8601,7 +8601,7 @@
                       </a:endParaRPr>
                     </a:p>
                   </a:txBody>
-                  <a:tcPr marL="101600" marR="101600" marT="50800" marB="50800" anchor="ctr">
+                  <a:tcPr marL="76200" marR="76200" marT="50800" marB="50800" anchor="ctr">
                     <a:lnL w="12700" cap="flat" cmpd="sng" algn="ctr">
                       <a:solidFill>
                         <a:srgbClr val="BFBFBF"/>
@@ -8666,7 +8666,7 @@
                       </a:endParaRPr>
                     </a:p>
                   </a:txBody>
-                  <a:tcPr marL="101600" marR="101600" marT="50800" marB="50800" anchor="ctr">
+                  <a:tcPr marL="76200" marR="76200" marT="50800" marB="50800" anchor="ctr">
                     <a:lnL w="12700" cap="flat" cmpd="sng" algn="ctr">
                       <a:solidFill>
                         <a:srgbClr val="BFBFBF"/>
@@ -8714,7 +8714,7 @@
                         <a:buNone/>
                       </a:pPr>
                       <a:r>
-                        <a:rPr lang="ja-JP" altLang="en-US" sz="2200" dirty="0">
+                        <a:rPr lang="ja-JP" altLang="en-US" sz="2200" b="1" dirty="0">
                           <a:solidFill>
                             <a:srgbClr val="D55E00"/>
                           </a:solidFill>
@@ -8731,7 +8731,7 @@
                       </a:endParaRPr>
                     </a:p>
                   </a:txBody>
-                  <a:tcPr marL="101600" marR="101600" marT="50800" marB="50800" anchor="ctr">
+                  <a:tcPr marL="76200" marR="76200" marT="50800" marB="50800" anchor="ctr">
                     <a:lnL w="12700" cap="flat" cmpd="sng" algn="ctr">
                       <a:solidFill>
                         <a:srgbClr val="BFBFBF"/>
@@ -8798,7 +8798,7 @@
                       </a:endParaRPr>
                     </a:p>
                   </a:txBody>
-                  <a:tcPr marL="101600" marR="101600" marT="50800" marB="50800" anchor="ctr">
+                  <a:tcPr marL="76200" marR="76200" marT="50800" marB="50800" anchor="ctr">
                     <a:lnL w="12700" cap="flat" cmpd="sng" algn="ctr">
                       <a:solidFill>
                         <a:srgbClr val="BFBFBF"/>
@@ -8863,7 +8863,7 @@
                       </a:endParaRPr>
                     </a:p>
                   </a:txBody>
-                  <a:tcPr marL="101600" marR="101600" marT="50800" marB="50800" anchor="ctr">
+                  <a:tcPr marL="76200" marR="76200" marT="50800" marB="50800" anchor="ctr">
                     <a:lnL w="12700" cap="flat" cmpd="sng" algn="ctr">
                       <a:solidFill>
                         <a:srgbClr val="BFBFBF"/>
@@ -8928,7 +8928,7 @@
                       </a:endParaRPr>
                     </a:p>
                   </a:txBody>
-                  <a:tcPr marL="101600" marR="101600" marT="50800" marB="50800" anchor="ctr">
+                  <a:tcPr marL="76200" marR="76200" marT="50800" marB="50800" anchor="ctr">
                     <a:lnL w="12700" cap="flat" cmpd="sng" algn="ctr">
                       <a:solidFill>
                         <a:srgbClr val="BFBFBF"/>
@@ -9014,7 +9014,7 @@
                       </a:endParaRPr>
                     </a:p>
                   </a:txBody>
-                  <a:tcPr marL="101600" marR="101600" marT="50800" marB="50800" anchor="ctr">
+                  <a:tcPr marL="76200" marR="76200" marT="50800" marB="50800" anchor="ctr">
                     <a:lnL w="12700" cap="flat" cmpd="sng" algn="ctr">
                       <a:solidFill>
                         <a:srgbClr val="BFBFBF"/>
@@ -9167,7 +9167,7 @@
           </a:xfrm>
           <a:prstGeom prst="roundRect">
             <a:avLst>
-              <a:gd name="adj" fmla="val 15625"/>
+              <a:gd name="adj" fmla="val 7813"/>
             </a:avLst>
           </a:prstGeom>
           <a:solidFill>
@@ -9176,14 +9176,14 @@
           <a:ln/>
         </p:spPr>
         <p:txBody>
-          <a:bodyPr wrap="square" lIns="0" tIns="0" rIns="0" bIns="0" rtlCol="0" anchor="ctr"/>
+          <a:bodyPr wrap="none" lIns="0" tIns="0" rIns="0" bIns="0" rtlCol="0" anchor="ctr"/>
           <a:lstStyle/>
           <a:p>
             <a:pPr algn="ctr" indent="0" marL="0">
               <a:buNone/>
             </a:pPr>
             <a:r>
-              <a:rPr lang="ja-JP" altLang="en-US" sz="1100" dirty="0">
+              <a:rPr lang="ja-JP" altLang="en-US" sz="1050" dirty="0">
                 <a:solidFill>
                   <a:srgbClr val="404040"/>
                 </a:solidFill>
@@ -9193,14 +9193,14 @@
               </a:rPr>
               <a:t>残存</a:t>
             </a:r>
-            <a:endParaRPr lang="ja-JP" sz="1100" dirty="0"/>
+            <a:endParaRPr lang="ja-JP" sz="1050" dirty="0"/>
           </a:p>
           <a:p>
             <a:pPr algn="ctr" indent="0" marL="0">
               <a:buNone/>
             </a:pPr>
             <a:r>
-              <a:rPr lang="ja-JP" altLang="en-US" sz="1100" dirty="0">
+              <a:rPr lang="ja-JP" altLang="en-US" sz="1050" dirty="0">
                 <a:solidFill>
                   <a:srgbClr val="404040"/>
                 </a:solidFill>
@@ -9210,7 +9210,7 @@
               </a:rPr>
               <a:t>筋弛緩</a:t>
             </a:r>
-            <a:endParaRPr lang="ja-JP" sz="1100" dirty="0"/>
+            <a:endParaRPr lang="ja-JP" sz="1050" dirty="0"/>
           </a:p>
         </p:txBody>
       </p:sp>
@@ -9227,7 +9227,7 @@
           </a:xfrm>
           <a:prstGeom prst="roundRect">
             <a:avLst>
-              <a:gd name="adj" fmla="val 15625"/>
+              <a:gd name="adj" fmla="val 7813"/>
             </a:avLst>
           </a:prstGeom>
           <a:solidFill>
@@ -9236,14 +9236,14 @@
           <a:ln/>
         </p:spPr>
         <p:txBody>
-          <a:bodyPr wrap="square" lIns="0" tIns="0" rIns="0" bIns="0" rtlCol="0" anchor="ctr"/>
+          <a:bodyPr wrap="none" lIns="0" tIns="0" rIns="0" bIns="0" rtlCol="0" anchor="ctr"/>
           <a:lstStyle/>
           <a:p>
             <a:pPr algn="ctr" indent="0" marL="0">
               <a:buNone/>
             </a:pPr>
             <a:r>
-              <a:rPr lang="ja-JP" altLang="en-US" sz="1100" dirty="0">
+              <a:rPr lang="ja-JP" altLang="en-US" sz="1050" dirty="0">
                 <a:solidFill>
                   <a:srgbClr val="404040"/>
                 </a:solidFill>
@@ -9253,14 +9253,14 @@
               </a:rPr>
               <a:t>スガマ</a:t>
             </a:r>
-            <a:endParaRPr lang="ja-JP" sz="1100" dirty="0"/>
+            <a:endParaRPr lang="ja-JP" sz="1050" dirty="0"/>
           </a:p>
           <a:p>
             <a:pPr algn="ctr" indent="0" marL="0">
               <a:buNone/>
             </a:pPr>
             <a:r>
-              <a:rPr lang="ja-JP" altLang="en-US" sz="1100" dirty="0">
+              <a:rPr lang="ja-JP" altLang="en-US" sz="1050" dirty="0">
                 <a:solidFill>
                   <a:srgbClr val="404040"/>
                 </a:solidFill>
@@ -9270,7 +9270,7 @@
               </a:rPr>
               <a:t>デクス</a:t>
             </a:r>
-            <a:endParaRPr lang="ja-JP" sz="1100" dirty="0"/>
+            <a:endParaRPr lang="ja-JP" sz="1050" dirty="0"/>
           </a:p>
         </p:txBody>
       </p:sp>
@@ -9287,7 +9287,7 @@
           </a:xfrm>
           <a:prstGeom prst="roundRect">
             <a:avLst>
-              <a:gd name="adj" fmla="val 15625"/>
+              <a:gd name="adj" fmla="val 7813"/>
             </a:avLst>
           </a:prstGeom>
           <a:solidFill>
@@ -9296,14 +9296,14 @@
           <a:ln/>
         </p:spPr>
         <p:txBody>
-          <a:bodyPr wrap="square" lIns="0" tIns="0" rIns="0" bIns="0" rtlCol="0" anchor="ctr"/>
+          <a:bodyPr wrap="none" lIns="0" tIns="0" rIns="0" bIns="0" rtlCol="0" anchor="ctr"/>
           <a:lstStyle/>
           <a:p>
             <a:pPr algn="ctr" indent="0" marL="0">
               <a:buNone/>
             </a:pPr>
             <a:r>
-              <a:rPr lang="ja-JP" altLang="en-US" sz="1100" dirty="0">
+              <a:rPr lang="ja-JP" altLang="en-US" sz="1050" dirty="0">
                 <a:solidFill>
                   <a:srgbClr val="404040"/>
                 </a:solidFill>
@@ -9313,14 +9313,14 @@
               </a:rPr>
               <a:t>ネオスチ</a:t>
             </a:r>
-            <a:endParaRPr lang="ja-JP" sz="1100" dirty="0"/>
+            <a:endParaRPr lang="ja-JP" sz="1050" dirty="0"/>
           </a:p>
           <a:p>
             <a:pPr algn="ctr" indent="0" marL="0">
               <a:buNone/>
             </a:pPr>
             <a:r>
-              <a:rPr lang="ja-JP" altLang="en-US" sz="1100" dirty="0">
+              <a:rPr lang="ja-JP" altLang="en-US" sz="1050" dirty="0">
                 <a:solidFill>
                   <a:srgbClr val="404040"/>
                 </a:solidFill>
@@ -9330,7 +9330,7 @@
               </a:rPr>
               <a:t>グミン</a:t>
             </a:r>
-            <a:endParaRPr lang="ja-JP" sz="1100" dirty="0"/>
+            <a:endParaRPr lang="ja-JP" sz="1050" dirty="0"/>
           </a:p>
         </p:txBody>
       </p:sp>
@@ -9347,7 +9347,7 @@
           </a:xfrm>
           <a:prstGeom prst="roundRect">
             <a:avLst>
-              <a:gd name="adj" fmla="val 15625"/>
+              <a:gd name="adj" fmla="val 7813"/>
             </a:avLst>
           </a:prstGeom>
           <a:solidFill>
@@ -9356,14 +9356,14 @@
           <a:ln/>
         </p:spPr>
         <p:txBody>
-          <a:bodyPr wrap="square" lIns="0" tIns="0" rIns="0" bIns="0" rtlCol="0" anchor="ctr"/>
+          <a:bodyPr wrap="none" lIns="0" tIns="0" rIns="0" bIns="0" rtlCol="0" anchor="ctr"/>
           <a:lstStyle/>
           <a:p>
             <a:pPr algn="ctr" indent="0" marL="0">
               <a:buNone/>
             </a:pPr>
             <a:r>
-              <a:rPr lang="ja-JP" altLang="en-US" sz="1100" b="1" dirty="0">
+              <a:rPr lang="ja-JP" altLang="en-US" sz="1050" b="1" dirty="0">
                 <a:solidFill>
                   <a:srgbClr val="FFFFFF"/>
                 </a:solidFill>
@@ -9373,14 +9373,14 @@
               </a:rPr>
               <a:t>再クラ</a:t>
             </a:r>
-            <a:endParaRPr lang="ja-JP" sz="1100" dirty="0"/>
+            <a:endParaRPr lang="ja-JP" sz="1050" dirty="0"/>
           </a:p>
           <a:p>
             <a:pPr algn="ctr" indent="0" marL="0">
               <a:buNone/>
             </a:pPr>
             <a:r>
-              <a:rPr lang="ja-JP" altLang="en-US" sz="1100" b="1" dirty="0">
+              <a:rPr lang="ja-JP" altLang="en-US" sz="1050" b="1" dirty="0">
                 <a:solidFill>
                   <a:srgbClr val="FFFFFF"/>
                 </a:solidFill>
@@ -9390,7 +9390,7 @@
               </a:rPr>
               <a:t>ーレ化</a:t>
             </a:r>
-            <a:endParaRPr lang="ja-JP" sz="1100" dirty="0"/>
+            <a:endParaRPr lang="ja-JP" sz="1050" dirty="0"/>
           </a:p>
         </p:txBody>
       </p:sp>
@@ -9407,7 +9407,7 @@
           </a:xfrm>
           <a:prstGeom prst="roundRect">
             <a:avLst>
-              <a:gd name="adj" fmla="val 15625"/>
+              <a:gd name="adj" fmla="val 7813"/>
             </a:avLst>
           </a:prstGeom>
           <a:solidFill>
@@ -9416,14 +9416,14 @@
           <a:ln/>
         </p:spPr>
         <p:txBody>
-          <a:bodyPr wrap="square" lIns="0" tIns="0" rIns="0" bIns="0" rtlCol="0" anchor="ctr"/>
+          <a:bodyPr wrap="none" lIns="0" tIns="0" rIns="0" bIns="0" rtlCol="0" anchor="ctr"/>
           <a:lstStyle/>
           <a:p>
             <a:pPr algn="ctr" indent="0" marL="0">
               <a:buNone/>
             </a:pPr>
             <a:r>
-              <a:rPr lang="ja-JP" altLang="en-US" sz="1100" dirty="0">
+              <a:rPr lang="ja-JP" altLang="en-US" sz="1050" dirty="0">
                 <a:solidFill>
                   <a:srgbClr val="404040"/>
                 </a:solidFill>
@@ -9433,7 +9433,7 @@
               </a:rPr>
               <a:t>手順</a:t>
             </a:r>
-            <a:endParaRPr lang="ja-JP" sz="1100" dirty="0"/>
+            <a:endParaRPr lang="ja-JP" sz="1050" dirty="0"/>
           </a:p>
         </p:txBody>
       </p:sp>
@@ -10183,7 +10183,7 @@
           </a:xfrm>
           <a:prstGeom prst="roundRect">
             <a:avLst>
-              <a:gd name="adj" fmla="val 15625"/>
+              <a:gd name="adj" fmla="val 7813"/>
             </a:avLst>
           </a:prstGeom>
           <a:solidFill>
@@ -10192,14 +10192,14 @@
           <a:ln/>
         </p:spPr>
         <p:txBody>
-          <a:bodyPr wrap="square" lIns="0" tIns="0" rIns="0" bIns="0" rtlCol="0" anchor="ctr"/>
+          <a:bodyPr wrap="none" lIns="0" tIns="0" rIns="0" bIns="0" rtlCol="0" anchor="ctr"/>
           <a:lstStyle/>
           <a:p>
             <a:pPr algn="ctr" indent="0" marL="0">
               <a:buNone/>
             </a:pPr>
             <a:r>
-              <a:rPr lang="ja-JP" altLang="en-US" sz="1100" dirty="0">
+              <a:rPr lang="ja-JP" altLang="en-US" sz="1050" dirty="0">
                 <a:solidFill>
                   <a:srgbClr val="404040"/>
                 </a:solidFill>
@@ -10209,14 +10209,14 @@
               </a:rPr>
               <a:t>残存</a:t>
             </a:r>
-            <a:endParaRPr lang="ja-JP" sz="1100" dirty="0"/>
+            <a:endParaRPr lang="ja-JP" sz="1050" dirty="0"/>
           </a:p>
           <a:p>
             <a:pPr algn="ctr" indent="0" marL="0">
               <a:buNone/>
             </a:pPr>
             <a:r>
-              <a:rPr lang="ja-JP" altLang="en-US" sz="1100" dirty="0">
+              <a:rPr lang="ja-JP" altLang="en-US" sz="1050" dirty="0">
                 <a:solidFill>
                   <a:srgbClr val="404040"/>
                 </a:solidFill>
@@ -10226,7 +10226,7 @@
               </a:rPr>
               <a:t>筋弛緩</a:t>
             </a:r>
-            <a:endParaRPr lang="ja-JP" sz="1100" dirty="0"/>
+            <a:endParaRPr lang="ja-JP" sz="1050" dirty="0"/>
           </a:p>
         </p:txBody>
       </p:sp>
@@ -10243,7 +10243,7 @@
           </a:xfrm>
           <a:prstGeom prst="roundRect">
             <a:avLst>
-              <a:gd name="adj" fmla="val 15625"/>
+              <a:gd name="adj" fmla="val 7813"/>
             </a:avLst>
           </a:prstGeom>
           <a:solidFill>
@@ -10252,14 +10252,14 @@
           <a:ln/>
         </p:spPr>
         <p:txBody>
-          <a:bodyPr wrap="square" lIns="0" tIns="0" rIns="0" bIns="0" rtlCol="0" anchor="ctr"/>
+          <a:bodyPr wrap="none" lIns="0" tIns="0" rIns="0" bIns="0" rtlCol="0" anchor="ctr"/>
           <a:lstStyle/>
           <a:p>
             <a:pPr algn="ctr" indent="0" marL="0">
               <a:buNone/>
             </a:pPr>
             <a:r>
-              <a:rPr lang="ja-JP" altLang="en-US" sz="1100" dirty="0">
+              <a:rPr lang="ja-JP" altLang="en-US" sz="1050" dirty="0">
                 <a:solidFill>
                   <a:srgbClr val="404040"/>
                 </a:solidFill>
@@ -10269,14 +10269,14 @@
               </a:rPr>
               <a:t>スガマ</a:t>
             </a:r>
-            <a:endParaRPr lang="ja-JP" sz="1100" dirty="0"/>
+            <a:endParaRPr lang="ja-JP" sz="1050" dirty="0"/>
           </a:p>
           <a:p>
             <a:pPr algn="ctr" indent="0" marL="0">
               <a:buNone/>
             </a:pPr>
             <a:r>
-              <a:rPr lang="ja-JP" altLang="en-US" sz="1100" dirty="0">
+              <a:rPr lang="ja-JP" altLang="en-US" sz="1050" dirty="0">
                 <a:solidFill>
                   <a:srgbClr val="404040"/>
                 </a:solidFill>
@@ -10286,7 +10286,7 @@
               </a:rPr>
               <a:t>デクス</a:t>
             </a:r>
-            <a:endParaRPr lang="ja-JP" sz="1100" dirty="0"/>
+            <a:endParaRPr lang="ja-JP" sz="1050" dirty="0"/>
           </a:p>
         </p:txBody>
       </p:sp>
@@ -10303,7 +10303,7 @@
           </a:xfrm>
           <a:prstGeom prst="roundRect">
             <a:avLst>
-              <a:gd name="adj" fmla="val 15625"/>
+              <a:gd name="adj" fmla="val 7813"/>
             </a:avLst>
           </a:prstGeom>
           <a:solidFill>
@@ -10312,14 +10312,14 @@
           <a:ln/>
         </p:spPr>
         <p:txBody>
-          <a:bodyPr wrap="square" lIns="0" tIns="0" rIns="0" bIns="0" rtlCol="0" anchor="ctr"/>
+          <a:bodyPr wrap="none" lIns="0" tIns="0" rIns="0" bIns="0" rtlCol="0" anchor="ctr"/>
           <a:lstStyle/>
           <a:p>
             <a:pPr algn="ctr" indent="0" marL="0">
               <a:buNone/>
             </a:pPr>
             <a:r>
-              <a:rPr lang="ja-JP" altLang="en-US" sz="1100" dirty="0">
+              <a:rPr lang="ja-JP" altLang="en-US" sz="1050" dirty="0">
                 <a:solidFill>
                   <a:srgbClr val="404040"/>
                 </a:solidFill>
@@ -10329,14 +10329,14 @@
               </a:rPr>
               <a:t>ネオスチ</a:t>
             </a:r>
-            <a:endParaRPr lang="ja-JP" sz="1100" dirty="0"/>
+            <a:endParaRPr lang="ja-JP" sz="1050" dirty="0"/>
           </a:p>
           <a:p>
             <a:pPr algn="ctr" indent="0" marL="0">
               <a:buNone/>
             </a:pPr>
             <a:r>
-              <a:rPr lang="ja-JP" altLang="en-US" sz="1100" dirty="0">
+              <a:rPr lang="ja-JP" altLang="en-US" sz="1050" dirty="0">
                 <a:solidFill>
                   <a:srgbClr val="404040"/>
                 </a:solidFill>
@@ -10346,7 +10346,7 @@
               </a:rPr>
               <a:t>グミン</a:t>
             </a:r>
-            <a:endParaRPr lang="ja-JP" sz="1100" dirty="0"/>
+            <a:endParaRPr lang="ja-JP" sz="1050" dirty="0"/>
           </a:p>
         </p:txBody>
       </p:sp>
@@ -10363,7 +10363,7 @@
           </a:xfrm>
           <a:prstGeom prst="roundRect">
             <a:avLst>
-              <a:gd name="adj" fmla="val 15625"/>
+              <a:gd name="adj" fmla="val 7813"/>
             </a:avLst>
           </a:prstGeom>
           <a:solidFill>
@@ -10372,14 +10372,14 @@
           <a:ln/>
         </p:spPr>
         <p:txBody>
-          <a:bodyPr wrap="square" lIns="0" tIns="0" rIns="0" bIns="0" rtlCol="0" anchor="ctr"/>
+          <a:bodyPr wrap="none" lIns="0" tIns="0" rIns="0" bIns="0" rtlCol="0" anchor="ctr"/>
           <a:lstStyle/>
           <a:p>
             <a:pPr algn="ctr" indent="0" marL="0">
               <a:buNone/>
             </a:pPr>
             <a:r>
-              <a:rPr lang="ja-JP" altLang="en-US" sz="1100" dirty="0">
+              <a:rPr lang="ja-JP" altLang="en-US" sz="1050" dirty="0">
                 <a:solidFill>
                   <a:srgbClr val="404040"/>
                 </a:solidFill>
@@ -10389,14 +10389,14 @@
               </a:rPr>
               <a:t>再クラ</a:t>
             </a:r>
-            <a:endParaRPr lang="ja-JP" sz="1100" dirty="0"/>
+            <a:endParaRPr lang="ja-JP" sz="1050" dirty="0"/>
           </a:p>
           <a:p>
             <a:pPr algn="ctr" indent="0" marL="0">
               <a:buNone/>
             </a:pPr>
             <a:r>
-              <a:rPr lang="ja-JP" altLang="en-US" sz="1100" dirty="0">
+              <a:rPr lang="ja-JP" altLang="en-US" sz="1050" dirty="0">
                 <a:solidFill>
                   <a:srgbClr val="404040"/>
                 </a:solidFill>
@@ -10406,7 +10406,7 @@
               </a:rPr>
               <a:t>ーレ化</a:t>
             </a:r>
-            <a:endParaRPr lang="ja-JP" sz="1100" dirty="0"/>
+            <a:endParaRPr lang="ja-JP" sz="1050" dirty="0"/>
           </a:p>
         </p:txBody>
       </p:sp>
@@ -10423,7 +10423,7 @@
           </a:xfrm>
           <a:prstGeom prst="roundRect">
             <a:avLst>
-              <a:gd name="adj" fmla="val 15625"/>
+              <a:gd name="adj" fmla="val 7813"/>
             </a:avLst>
           </a:prstGeom>
           <a:solidFill>
@@ -10432,14 +10432,14 @@
           <a:ln/>
         </p:spPr>
         <p:txBody>
-          <a:bodyPr wrap="square" lIns="0" tIns="0" rIns="0" bIns="0" rtlCol="0" anchor="ctr"/>
+          <a:bodyPr wrap="none" lIns="0" tIns="0" rIns="0" bIns="0" rtlCol="0" anchor="ctr"/>
           <a:lstStyle/>
           <a:p>
             <a:pPr algn="ctr" indent="0" marL="0">
               <a:buNone/>
             </a:pPr>
             <a:r>
-              <a:rPr lang="ja-JP" altLang="en-US" sz="1100" b="1" dirty="0">
+              <a:rPr lang="ja-JP" altLang="en-US" sz="1050" b="1" dirty="0">
                 <a:solidFill>
                   <a:srgbClr val="FFFFFF"/>
                 </a:solidFill>
@@ -10449,7 +10449,7 @@
               </a:rPr>
               <a:t>手順</a:t>
             </a:r>
-            <a:endParaRPr lang="ja-JP" sz="1100" dirty="0"/>
+            <a:endParaRPr lang="ja-JP" sz="1050" dirty="0"/>
           </a:p>
         </p:txBody>
       </p:sp>
@@ -10556,12 +10556,12 @@
         </p:nvSpPr>
         <p:spPr>
           <a:xfrm>
-            <a:off x="502920" y="2702052"/>
-            <a:ext cx="2556705" cy="2011680"/>
+            <a:off x="502920" y="2272284"/>
+            <a:ext cx="2593341" cy="2377440"/>
           </a:xfrm>
           <a:prstGeom prst="roundRect">
             <a:avLst>
-              <a:gd name="adj" fmla="val 4545"/>
+              <a:gd name="adj" fmla="val 3846"/>
             </a:avLst>
           </a:prstGeom>
           <a:solidFill>
@@ -10574,14 +10574,14 @@
           </a:ln>
         </p:spPr>
         <p:txBody>
-          <a:bodyPr wrap="square" lIns="36576" tIns="36576" rIns="36576" bIns="36576" rtlCol="0" anchor="ctr"/>
+          <a:bodyPr wrap="square" lIns="137160" tIns="137160" rIns="137160" bIns="137160" rtlCol="0" anchor="ctr"/>
           <a:lstStyle/>
           <a:p>
             <a:pPr algn="ctr" indent="0" marL="0">
               <a:buNone/>
             </a:pPr>
             <a:r>
-              <a:rPr lang="ja-JP" altLang="en-US" sz="2400" b="1" dirty="0">
+              <a:rPr lang="ja-JP" altLang="en-US" sz="2200" b="1" dirty="0">
                 <a:solidFill>
                   <a:srgbClr val="262626"/>
                 </a:solidFill>
@@ -10591,14 +10591,14 @@
               </a:rPr>
               <a:t>深さを測る</a:t>
             </a:r>
-            <a:endParaRPr lang="ja-JP" sz="2400" dirty="0"/>
+            <a:endParaRPr lang="ja-JP" sz="2200" dirty="0"/>
           </a:p>
           <a:p>
             <a:pPr algn="ctr" indent="0" marL="0">
               <a:buNone/>
             </a:pPr>
             <a:r>
-              <a:rPr lang="ja-JP" altLang="en-US" sz="2400" b="1" dirty="0">
+              <a:rPr lang="ja-JP" altLang="en-US" sz="2200" b="1" dirty="0">
                 <a:solidFill>
                   <a:srgbClr val="262626"/>
                 </a:solidFill>
@@ -10608,48 +10608,24 @@
               </a:rPr>
               <a:t>（TOF・PTC）</a:t>
             </a:r>
-            <a:endParaRPr lang="ja-JP" sz="2400" dirty="0"/>
-          </a:p>
-        </p:txBody>
-      </p:sp>
-      <p:sp>
-        <p:nvSpPr>
-          <p:cNvPr id="12" name="Shape 10"/>
+            <a:endParaRPr lang="ja-JP" sz="2200" dirty="0"/>
+          </a:p>
+        </p:txBody>
+      </p:sp>
+      <p:sp>
+        <p:nvSpPr>
+          <p:cNvPr id="12" name="Text 10"/>
           <p:cNvSpPr/>
           <p:nvPr/>
         </p:nvSpPr>
         <p:spPr>
           <a:xfrm>
-            <a:off x="3151065" y="3707892"/>
-            <a:ext cx="274320" cy="0"/>
-          </a:xfrm>
-          <a:prstGeom prst="line">
-            <a:avLst/>
-          </a:prstGeom>
-          <a:noFill/>
-          <a:ln w="38100">
-            <a:solidFill>
-              <a:srgbClr val="404040"/>
-            </a:solidFill>
-            <a:prstDash val="solid"/>
-            <a:tailEnd type="triangle"/>
-          </a:ln>
-        </p:spPr>
-      </p:sp>
-      <p:sp>
-        <p:nvSpPr>
-          <p:cNvPr id="13" name="Text 11"/>
-          <p:cNvSpPr/>
-          <p:nvPr/>
-        </p:nvSpPr>
-        <p:spPr>
-          <a:xfrm>
-            <a:off x="3516825" y="2702052"/>
-            <a:ext cx="1150109" cy="2011680"/>
+            <a:off x="3315717" y="2272284"/>
+            <a:ext cx="1532848" cy="2377440"/>
           </a:xfrm>
           <a:prstGeom prst="roundRect">
             <a:avLst>
-              <a:gd name="adj" fmla="val 7951"/>
+              <a:gd name="adj" fmla="val 5965"/>
             </a:avLst>
           </a:prstGeom>
           <a:solidFill>
@@ -10662,14 +10638,14 @@
           </a:ln>
         </p:spPr>
         <p:txBody>
-          <a:bodyPr wrap="square" lIns="36576" tIns="36576" rIns="36576" bIns="36576" rtlCol="0" anchor="ctr"/>
+          <a:bodyPr wrap="square" lIns="73152" tIns="73152" rIns="73152" bIns="73152" rtlCol="0" anchor="ctr"/>
           <a:lstStyle/>
           <a:p>
             <a:pPr algn="ctr" indent="0" marL="0">
               <a:buNone/>
             </a:pPr>
             <a:r>
-              <a:rPr lang="ja-JP" altLang="en-US" sz="2400" b="1" dirty="0">
+              <a:rPr lang="ja-JP" altLang="en-US" sz="2200" b="1" dirty="0">
                 <a:solidFill>
                   <a:srgbClr val="262626"/>
                 </a:solidFill>
@@ -10679,14 +10655,14 @@
               </a:rPr>
               <a:t>深さで</a:t>
             </a:r>
-            <a:endParaRPr lang="ja-JP" sz="2400" dirty="0"/>
+            <a:endParaRPr lang="ja-JP" sz="2200" dirty="0"/>
           </a:p>
           <a:p>
             <a:pPr algn="ctr" indent="0" marL="0">
               <a:buNone/>
             </a:pPr>
             <a:r>
-              <a:rPr lang="ja-JP" altLang="en-US" sz="2400" b="1" dirty="0">
+              <a:rPr lang="ja-JP" altLang="en-US" sz="2200" b="1" dirty="0">
                 <a:solidFill>
                   <a:srgbClr val="262626"/>
                 </a:solidFill>
@@ -10696,14 +10672,14 @@
               </a:rPr>
               <a:t>用量を</a:t>
             </a:r>
-            <a:endParaRPr lang="ja-JP" sz="2400" dirty="0"/>
+            <a:endParaRPr lang="ja-JP" sz="2200" dirty="0"/>
           </a:p>
           <a:p>
             <a:pPr algn="ctr" indent="0" marL="0">
               <a:buNone/>
             </a:pPr>
             <a:r>
-              <a:rPr lang="ja-JP" altLang="en-US" sz="2400" b="1" dirty="0">
+              <a:rPr lang="ja-JP" altLang="en-US" sz="2200" b="1" dirty="0">
                 <a:solidFill>
                   <a:srgbClr val="262626"/>
                 </a:solidFill>
@@ -10713,48 +10689,24 @@
               </a:rPr>
               <a:t>決める</a:t>
             </a:r>
-            <a:endParaRPr lang="ja-JP" sz="2400" dirty="0"/>
-          </a:p>
-        </p:txBody>
-      </p:sp>
-      <p:sp>
-        <p:nvSpPr>
-          <p:cNvPr id="14" name="Shape 12"/>
+            <a:endParaRPr lang="ja-JP" sz="2200" dirty="0"/>
+          </a:p>
+        </p:txBody>
+      </p:sp>
+      <p:sp>
+        <p:nvSpPr>
+          <p:cNvPr id="13" name="Text 11"/>
           <p:cNvSpPr/>
           <p:nvPr/>
         </p:nvSpPr>
         <p:spPr>
           <a:xfrm>
-            <a:off x="4758373" y="3707892"/>
-            <a:ext cx="274320" cy="0"/>
-          </a:xfrm>
-          <a:prstGeom prst="line">
-            <a:avLst/>
-          </a:prstGeom>
-          <a:noFill/>
-          <a:ln w="38100">
-            <a:solidFill>
-              <a:srgbClr val="404040"/>
-            </a:solidFill>
-            <a:prstDash val="solid"/>
-            <a:tailEnd type="triangle"/>
-          </a:ln>
-        </p:spPr>
-      </p:sp>
-      <p:sp>
-        <p:nvSpPr>
-          <p:cNvPr id="15" name="Text 13"/>
-          <p:cNvSpPr/>
-          <p:nvPr/>
-        </p:nvSpPr>
-        <p:spPr>
-          <a:xfrm>
-            <a:off x="5124133" y="2702052"/>
-            <a:ext cx="1491485" cy="2011680"/>
+            <a:off x="5068021" y="2272284"/>
+            <a:ext cx="1532848" cy="2377440"/>
           </a:xfrm>
           <a:prstGeom prst="roundRect">
             <a:avLst>
-              <a:gd name="adj" fmla="val 6131"/>
+              <a:gd name="adj" fmla="val 5965"/>
             </a:avLst>
           </a:prstGeom>
           <a:solidFill>
@@ -10767,14 +10719,14 @@
           </a:ln>
         </p:spPr>
         <p:txBody>
-          <a:bodyPr wrap="square" lIns="36576" tIns="36576" rIns="36576" bIns="36576" rtlCol="0" anchor="ctr"/>
+          <a:bodyPr wrap="square" lIns="73152" tIns="73152" rIns="73152" bIns="73152" rtlCol="0" anchor="ctr"/>
           <a:lstStyle/>
           <a:p>
             <a:pPr algn="ctr" indent="0" marL="0">
               <a:buNone/>
             </a:pPr>
             <a:r>
-              <a:rPr lang="ja-JP" altLang="en-US" sz="2400" b="1" dirty="0">
+              <a:rPr lang="ja-JP" altLang="en-US" sz="2200" b="1" dirty="0">
                 <a:solidFill>
                   <a:srgbClr val="262626"/>
                 </a:solidFill>
@@ -10784,14 +10736,14 @@
               </a:rPr>
               <a:t>拮抗薬を</a:t>
             </a:r>
-            <a:endParaRPr lang="ja-JP" sz="2400" dirty="0"/>
+            <a:endParaRPr lang="ja-JP" sz="2200" dirty="0"/>
           </a:p>
           <a:p>
             <a:pPr algn="ctr" indent="0" marL="0">
               <a:buNone/>
             </a:pPr>
             <a:r>
-              <a:rPr lang="ja-JP" altLang="en-US" sz="2400" b="1" dirty="0">
+              <a:rPr lang="ja-JP" altLang="en-US" sz="2200" b="1" dirty="0">
                 <a:solidFill>
                   <a:srgbClr val="262626"/>
                 </a:solidFill>
@@ -10801,48 +10753,24 @@
               </a:rPr>
               <a:t>投与</a:t>
             </a:r>
-            <a:endParaRPr lang="ja-JP" sz="2400" dirty="0"/>
-          </a:p>
-        </p:txBody>
-      </p:sp>
-      <p:sp>
-        <p:nvSpPr>
-          <p:cNvPr id="16" name="Shape 14"/>
+            <a:endParaRPr lang="ja-JP" sz="2200" dirty="0"/>
+          </a:p>
+        </p:txBody>
+      </p:sp>
+      <p:sp>
+        <p:nvSpPr>
+          <p:cNvPr id="14" name="Text 12"/>
           <p:cNvSpPr/>
           <p:nvPr/>
         </p:nvSpPr>
         <p:spPr>
           <a:xfrm>
-            <a:off x="6707058" y="3707892"/>
-            <a:ext cx="274320" cy="0"/>
-          </a:xfrm>
-          <a:prstGeom prst="line">
-            <a:avLst/>
-          </a:prstGeom>
-          <a:noFill/>
-          <a:ln w="38100">
-            <a:solidFill>
-              <a:srgbClr val="404040"/>
-            </a:solidFill>
-            <a:prstDash val="solid"/>
-            <a:tailEnd type="triangle"/>
-          </a:ln>
-        </p:spPr>
-      </p:sp>
-      <p:sp>
-        <p:nvSpPr>
-          <p:cNvPr id="17" name="Text 15"/>
-          <p:cNvSpPr/>
-          <p:nvPr/>
-        </p:nvSpPr>
-        <p:spPr>
-          <a:xfrm>
-            <a:off x="7072818" y="2702052"/>
-            <a:ext cx="1929862" cy="2011680"/>
+            <a:off x="6820325" y="2272284"/>
+            <a:ext cx="2567900" cy="2377440"/>
           </a:xfrm>
           <a:prstGeom prst="roundRect">
             <a:avLst>
-              <a:gd name="adj" fmla="val 4738"/>
+              <a:gd name="adj" fmla="val 3846"/>
             </a:avLst>
           </a:prstGeom>
           <a:solidFill>
@@ -10855,14 +10783,14 @@
           </a:ln>
         </p:spPr>
         <p:txBody>
-          <a:bodyPr wrap="square" lIns="36576" tIns="36576" rIns="36576" bIns="36576" rtlCol="0" anchor="ctr"/>
+          <a:bodyPr wrap="square" lIns="137160" tIns="137160" rIns="137160" bIns="137160" rtlCol="0" anchor="ctr"/>
           <a:lstStyle/>
           <a:p>
             <a:pPr algn="ctr" indent="0" marL="0">
               <a:buNone/>
             </a:pPr>
             <a:r>
-              <a:rPr lang="ja-JP" altLang="en-US" sz="2400" b="1" dirty="0">
+              <a:rPr lang="ja-JP" altLang="en-US" sz="2200" b="1" dirty="0">
                 <a:solidFill>
                   <a:srgbClr val="262626"/>
                 </a:solidFill>
@@ -10872,14 +10800,14 @@
               </a:rPr>
               <a:t>定量 TOF比</a:t>
             </a:r>
-            <a:endParaRPr lang="ja-JP" sz="2400" dirty="0"/>
+            <a:endParaRPr lang="ja-JP" sz="2200" dirty="0"/>
           </a:p>
           <a:p>
             <a:pPr algn="ctr" indent="0" marL="0">
               <a:buNone/>
             </a:pPr>
             <a:r>
-              <a:rPr lang="ja-JP" altLang="en-US" sz="2400" b="1" dirty="0">
+              <a:rPr lang="ja-JP" altLang="en-US" sz="2200" b="1" dirty="0">
                 <a:solidFill>
                   <a:srgbClr val="262626"/>
                 </a:solidFill>
@@ -10887,67 +10815,26 @@
                 <a:ea typeface="メイリオ" pitchFamily="34" charset="-122"/>
                 <a:cs typeface="メイリオ" pitchFamily="34" charset="-120"/>
               </a:rPr>
-              <a:t>0.9 以上を</a:t>
-            </a:r>
-            <a:endParaRPr lang="ja-JP" sz="2400" dirty="0"/>
-          </a:p>
-          <a:p>
-            <a:pPr algn="ctr" indent="0" marL="0">
-              <a:buNone/>
-            </a:pPr>
-            <a:r>
-              <a:rPr lang="ja-JP" altLang="en-US" sz="2400" b="1" dirty="0">
-                <a:solidFill>
-                  <a:srgbClr val="262626"/>
-                </a:solidFill>
-                <a:latin typeface="メイリオ" pitchFamily="34" charset="0"/>
-                <a:ea typeface="メイリオ" pitchFamily="34" charset="-122"/>
-                <a:cs typeface="メイリオ" pitchFamily="34" charset="-120"/>
-              </a:rPr>
-              <a:t>確認</a:t>
-            </a:r>
-            <a:endParaRPr lang="ja-JP" sz="2400" dirty="0"/>
-          </a:p>
-        </p:txBody>
-      </p:sp>
-      <p:sp>
-        <p:nvSpPr>
-          <p:cNvPr id="18" name="Shape 16"/>
+              <a:t>0.9 以上を確認</a:t>
+            </a:r>
+            <a:endParaRPr lang="ja-JP" sz="2200" dirty="0"/>
+          </a:p>
+        </p:txBody>
+      </p:sp>
+      <p:sp>
+        <p:nvSpPr>
+          <p:cNvPr id="15" name="Text 13"/>
           <p:cNvSpPr/>
           <p:nvPr/>
         </p:nvSpPr>
         <p:spPr>
           <a:xfrm>
-            <a:off x="9094121" y="3707892"/>
-            <a:ext cx="274320" cy="0"/>
-          </a:xfrm>
-          <a:prstGeom prst="line">
-            <a:avLst/>
-          </a:prstGeom>
-          <a:noFill/>
-          <a:ln w="38100">
-            <a:solidFill>
-              <a:srgbClr val="404040"/>
-            </a:solidFill>
-            <a:prstDash val="solid"/>
-            <a:tailEnd type="triangle"/>
-          </a:ln>
-        </p:spPr>
-      </p:sp>
-      <p:sp>
-        <p:nvSpPr>
-          <p:cNvPr id="19" name="Text 17"/>
-          <p:cNvSpPr/>
-          <p:nvPr/>
-        </p:nvSpPr>
-        <p:spPr>
-          <a:xfrm>
-            <a:off x="9459881" y="2702052"/>
-            <a:ext cx="2226151" cy="2011680"/>
+            <a:off x="9607681" y="2272284"/>
+            <a:ext cx="2078351" cy="2377440"/>
           </a:xfrm>
           <a:prstGeom prst="roundRect">
             <a:avLst>
-              <a:gd name="adj" fmla="val 4545"/>
+              <a:gd name="adj" fmla="val 4400"/>
             </a:avLst>
           </a:prstGeom>
           <a:solidFill>
@@ -10960,14 +10847,14 @@
           </a:ln>
         </p:spPr>
         <p:txBody>
-          <a:bodyPr wrap="square" lIns="36576" tIns="36576" rIns="36576" bIns="36576" rtlCol="0" anchor="ctr"/>
+          <a:bodyPr wrap="square" lIns="73152" tIns="73152" rIns="73152" bIns="73152" rtlCol="0" anchor="ctr"/>
           <a:lstStyle/>
           <a:p>
             <a:pPr algn="ctr" indent="0" marL="0">
               <a:buNone/>
             </a:pPr>
             <a:r>
-              <a:rPr lang="ja-JP" altLang="en-US" sz="2400" b="1" dirty="0">
+              <a:rPr lang="ja-JP" altLang="en-US" sz="2200" b="1" dirty="0">
                 <a:solidFill>
                   <a:srgbClr val="262626"/>
                 </a:solidFill>
@@ -10977,14 +10864,14 @@
               </a:rPr>
               <a:t>意識・呼吸と</a:t>
             </a:r>
-            <a:endParaRPr lang="ja-JP" sz="2400" dirty="0"/>
+            <a:endParaRPr lang="ja-JP" sz="2200" dirty="0"/>
           </a:p>
           <a:p>
             <a:pPr algn="ctr" indent="0" marL="0">
               <a:buNone/>
             </a:pPr>
             <a:r>
-              <a:rPr lang="ja-JP" altLang="en-US" sz="2400" b="1" dirty="0">
+              <a:rPr lang="ja-JP" altLang="en-US" sz="2200" b="1" dirty="0">
                 <a:solidFill>
                   <a:srgbClr val="262626"/>
                 </a:solidFill>
@@ -10994,9 +10881,33 @@
               </a:rPr>
               <a:t>合わせて抜管</a:t>
             </a:r>
-            <a:endParaRPr lang="ja-JP" sz="2400" dirty="0"/>
-          </a:p>
-        </p:txBody>
+            <a:endParaRPr lang="ja-JP" sz="2200" dirty="0"/>
+          </a:p>
+        </p:txBody>
+      </p:sp>
+      <p:sp>
+        <p:nvSpPr>
+          <p:cNvPr id="16" name="Shape 14"/>
+          <p:cNvSpPr/>
+          <p:nvPr/>
+        </p:nvSpPr>
+        <p:spPr>
+          <a:xfrm>
+            <a:off x="502920" y="5033772"/>
+            <a:ext cx="11183112" cy="0"/>
+          </a:xfrm>
+          <a:prstGeom prst="line">
+            <a:avLst/>
+          </a:prstGeom>
+          <a:noFill/>
+          <a:ln w="57150">
+            <a:solidFill>
+              <a:srgbClr val="404040"/>
+            </a:solidFill>
+            <a:prstDash val="solid"/>
+            <a:tailEnd type="triangle"/>
+          </a:ln>
+        </p:spPr>
       </p:sp>
     </p:spTree>
   </p:cSld>
@@ -11107,7 +11018,7 @@
           </a:xfrm>
           <a:prstGeom prst="roundRect">
             <a:avLst>
-              <a:gd name="adj" fmla="val 15625"/>
+              <a:gd name="adj" fmla="val 7813"/>
             </a:avLst>
           </a:prstGeom>
           <a:solidFill>
@@ -11116,14 +11027,14 @@
           <a:ln/>
         </p:spPr>
         <p:txBody>
-          <a:bodyPr wrap="square" lIns="0" tIns="0" rIns="0" bIns="0" rtlCol="0" anchor="ctr"/>
+          <a:bodyPr wrap="none" lIns="0" tIns="0" rIns="0" bIns="0" rtlCol="0" anchor="ctr"/>
           <a:lstStyle/>
           <a:p>
             <a:pPr algn="ctr" indent="0" marL="0">
               <a:buNone/>
             </a:pPr>
             <a:r>
-              <a:rPr lang="ja-JP" altLang="en-US" sz="1100" dirty="0">
+              <a:rPr lang="ja-JP" altLang="en-US" sz="1050" dirty="0">
                 <a:solidFill>
                   <a:srgbClr val="404040"/>
                 </a:solidFill>
@@ -11133,14 +11044,14 @@
               </a:rPr>
               <a:t>残存</a:t>
             </a:r>
-            <a:endParaRPr lang="ja-JP" sz="1100" dirty="0"/>
+            <a:endParaRPr lang="ja-JP" sz="1050" dirty="0"/>
           </a:p>
           <a:p>
             <a:pPr algn="ctr" indent="0" marL="0">
               <a:buNone/>
             </a:pPr>
             <a:r>
-              <a:rPr lang="ja-JP" altLang="en-US" sz="1100" dirty="0">
+              <a:rPr lang="ja-JP" altLang="en-US" sz="1050" dirty="0">
                 <a:solidFill>
                   <a:srgbClr val="404040"/>
                 </a:solidFill>
@@ -11150,7 +11061,7 @@
               </a:rPr>
               <a:t>筋弛緩</a:t>
             </a:r>
-            <a:endParaRPr lang="ja-JP" sz="1100" dirty="0"/>
+            <a:endParaRPr lang="ja-JP" sz="1050" dirty="0"/>
           </a:p>
         </p:txBody>
       </p:sp>
@@ -11167,7 +11078,7 @@
           </a:xfrm>
           <a:prstGeom prst="roundRect">
             <a:avLst>
-              <a:gd name="adj" fmla="val 15625"/>
+              <a:gd name="adj" fmla="val 7813"/>
             </a:avLst>
           </a:prstGeom>
           <a:solidFill>
@@ -11176,14 +11087,14 @@
           <a:ln/>
         </p:spPr>
         <p:txBody>
-          <a:bodyPr wrap="square" lIns="0" tIns="0" rIns="0" bIns="0" rtlCol="0" anchor="ctr"/>
+          <a:bodyPr wrap="none" lIns="0" tIns="0" rIns="0" bIns="0" rtlCol="0" anchor="ctr"/>
           <a:lstStyle/>
           <a:p>
             <a:pPr algn="ctr" indent="0" marL="0">
               <a:buNone/>
             </a:pPr>
             <a:r>
-              <a:rPr lang="ja-JP" altLang="en-US" sz="1100" dirty="0">
+              <a:rPr lang="ja-JP" altLang="en-US" sz="1050" dirty="0">
                 <a:solidFill>
                   <a:srgbClr val="404040"/>
                 </a:solidFill>
@@ -11193,14 +11104,14 @@
               </a:rPr>
               <a:t>スガマ</a:t>
             </a:r>
-            <a:endParaRPr lang="ja-JP" sz="1100" dirty="0"/>
+            <a:endParaRPr lang="ja-JP" sz="1050" dirty="0"/>
           </a:p>
           <a:p>
             <a:pPr algn="ctr" indent="0" marL="0">
               <a:buNone/>
             </a:pPr>
             <a:r>
-              <a:rPr lang="ja-JP" altLang="en-US" sz="1100" dirty="0">
+              <a:rPr lang="ja-JP" altLang="en-US" sz="1050" dirty="0">
                 <a:solidFill>
                   <a:srgbClr val="404040"/>
                 </a:solidFill>
@@ -11210,7 +11121,7 @@
               </a:rPr>
               <a:t>デクス</a:t>
             </a:r>
-            <a:endParaRPr lang="ja-JP" sz="1100" dirty="0"/>
+            <a:endParaRPr lang="ja-JP" sz="1050" dirty="0"/>
           </a:p>
         </p:txBody>
       </p:sp>
@@ -11227,7 +11138,7 @@
           </a:xfrm>
           <a:prstGeom prst="roundRect">
             <a:avLst>
-              <a:gd name="adj" fmla="val 15625"/>
+              <a:gd name="adj" fmla="val 7813"/>
             </a:avLst>
           </a:prstGeom>
           <a:solidFill>
@@ -11236,14 +11147,14 @@
           <a:ln/>
         </p:spPr>
         <p:txBody>
-          <a:bodyPr wrap="square" lIns="0" tIns="0" rIns="0" bIns="0" rtlCol="0" anchor="ctr"/>
+          <a:bodyPr wrap="none" lIns="0" tIns="0" rIns="0" bIns="0" rtlCol="0" anchor="ctr"/>
           <a:lstStyle/>
           <a:p>
             <a:pPr algn="ctr" indent="0" marL="0">
               <a:buNone/>
             </a:pPr>
             <a:r>
-              <a:rPr lang="ja-JP" altLang="en-US" sz="1100" dirty="0">
+              <a:rPr lang="ja-JP" altLang="en-US" sz="1050" dirty="0">
                 <a:solidFill>
                   <a:srgbClr val="404040"/>
                 </a:solidFill>
@@ -11253,14 +11164,14 @@
               </a:rPr>
               <a:t>ネオスチ</a:t>
             </a:r>
-            <a:endParaRPr lang="ja-JP" sz="1100" dirty="0"/>
+            <a:endParaRPr lang="ja-JP" sz="1050" dirty="0"/>
           </a:p>
           <a:p>
             <a:pPr algn="ctr" indent="0" marL="0">
               <a:buNone/>
             </a:pPr>
             <a:r>
-              <a:rPr lang="ja-JP" altLang="en-US" sz="1100" dirty="0">
+              <a:rPr lang="ja-JP" altLang="en-US" sz="1050" dirty="0">
                 <a:solidFill>
                   <a:srgbClr val="404040"/>
                 </a:solidFill>
@@ -11270,7 +11181,7 @@
               </a:rPr>
               <a:t>グミン</a:t>
             </a:r>
-            <a:endParaRPr lang="ja-JP" sz="1100" dirty="0"/>
+            <a:endParaRPr lang="ja-JP" sz="1050" dirty="0"/>
           </a:p>
         </p:txBody>
       </p:sp>
@@ -11287,7 +11198,7 @@
           </a:xfrm>
           <a:prstGeom prst="roundRect">
             <a:avLst>
-              <a:gd name="adj" fmla="val 15625"/>
+              <a:gd name="adj" fmla="val 7813"/>
             </a:avLst>
           </a:prstGeom>
           <a:solidFill>
@@ -11296,14 +11207,14 @@
           <a:ln/>
         </p:spPr>
         <p:txBody>
-          <a:bodyPr wrap="square" lIns="0" tIns="0" rIns="0" bIns="0" rtlCol="0" anchor="ctr"/>
+          <a:bodyPr wrap="none" lIns="0" tIns="0" rIns="0" bIns="0" rtlCol="0" anchor="ctr"/>
           <a:lstStyle/>
           <a:p>
             <a:pPr algn="ctr" indent="0" marL="0">
               <a:buNone/>
             </a:pPr>
             <a:r>
-              <a:rPr lang="ja-JP" altLang="en-US" sz="1100" dirty="0">
+              <a:rPr lang="ja-JP" altLang="en-US" sz="1050" dirty="0">
                 <a:solidFill>
                   <a:srgbClr val="404040"/>
                 </a:solidFill>
@@ -11313,14 +11224,14 @@
               </a:rPr>
               <a:t>再クラ</a:t>
             </a:r>
-            <a:endParaRPr lang="ja-JP" sz="1100" dirty="0"/>
+            <a:endParaRPr lang="ja-JP" sz="1050" dirty="0"/>
           </a:p>
           <a:p>
             <a:pPr algn="ctr" indent="0" marL="0">
               <a:buNone/>
             </a:pPr>
             <a:r>
-              <a:rPr lang="ja-JP" altLang="en-US" sz="1100" dirty="0">
+              <a:rPr lang="ja-JP" altLang="en-US" sz="1050" dirty="0">
                 <a:solidFill>
                   <a:srgbClr val="404040"/>
                 </a:solidFill>
@@ -11330,7 +11241,7 @@
               </a:rPr>
               <a:t>ーレ化</a:t>
             </a:r>
-            <a:endParaRPr lang="ja-JP" sz="1100" dirty="0"/>
+            <a:endParaRPr lang="ja-JP" sz="1050" dirty="0"/>
           </a:p>
         </p:txBody>
       </p:sp>
@@ -11347,7 +11258,7 @@
           </a:xfrm>
           <a:prstGeom prst="roundRect">
             <a:avLst>
-              <a:gd name="adj" fmla="val 15625"/>
+              <a:gd name="adj" fmla="val 7813"/>
             </a:avLst>
           </a:prstGeom>
           <a:solidFill>
@@ -11356,14 +11267,14 @@
           <a:ln/>
         </p:spPr>
         <p:txBody>
-          <a:bodyPr wrap="square" lIns="0" tIns="0" rIns="0" bIns="0" rtlCol="0" anchor="ctr"/>
+          <a:bodyPr wrap="none" lIns="0" tIns="0" rIns="0" bIns="0" rtlCol="0" anchor="ctr"/>
           <a:lstStyle/>
           <a:p>
             <a:pPr algn="ctr" indent="0" marL="0">
               <a:buNone/>
             </a:pPr>
             <a:r>
-              <a:rPr lang="ja-JP" altLang="en-US" sz="1100" b="1" dirty="0">
+              <a:rPr lang="ja-JP" altLang="en-US" sz="1050" b="1" dirty="0">
                 <a:solidFill>
                   <a:srgbClr val="FFFFFF"/>
                 </a:solidFill>
@@ -11373,7 +11284,7 @@
               </a:rPr>
               <a:t>手順</a:t>
             </a:r>
-            <a:endParaRPr lang="ja-JP" sz="1100" dirty="0"/>
+            <a:endParaRPr lang="ja-JP" sz="1050" dirty="0"/>
           </a:p>
         </p:txBody>
       </p:sp>
@@ -11480,8 +11391,8 @@
         </p:nvSpPr>
         <p:spPr>
           <a:xfrm>
-            <a:off x="502920" y="1755648"/>
-            <a:ext cx="11155680" cy="3813048"/>
+            <a:off x="502920" y="1783080"/>
+            <a:ext cx="11155680" cy="3831336"/>
           </a:xfrm>
           <a:prstGeom prst="rect">
             <a:avLst/>
@@ -11493,15 +11404,15 @@
           <a:bodyPr wrap="square" lIns="0" tIns="0" rIns="0" bIns="0" rtlCol="0" anchor="t"/>
           <a:lstStyle/>
           <a:p>
-            <a:pPr algn="l" marL="406400" indent="-406400">
+            <a:pPr algn="l" marL="355600" indent="-355600">
               <a:spcAft>
-                <a:spcPts val="2200"/>
+                <a:spcPts val="2800"/>
               </a:spcAft>
               <a:buSzPct val="100000"/>
               <a:buChar char="•"/>
             </a:pPr>
             <a:r>
-              <a:rPr lang="ja-JP" altLang="en-US" sz="2800" dirty="0">
+              <a:rPr lang="ja-JP" altLang="en-US" sz="2400" dirty="0">
                 <a:solidFill>
                   <a:srgbClr val="262626"/>
                 </a:solidFill>
@@ -11511,18 +11422,18 @@
               </a:rPr>
               <a:t>高齢者、肝・腎機能障害</a:t>
             </a:r>
-            <a:endParaRPr lang="ja-JP" sz="2800" dirty="0"/>
-          </a:p>
-          <a:p>
-            <a:pPr algn="l" marL="406400" indent="-406400">
+            <a:endParaRPr lang="ja-JP" sz="2400" dirty="0"/>
+          </a:p>
+          <a:p>
+            <a:pPr algn="l" marL="355600" indent="-355600">
               <a:spcAft>
-                <a:spcPts val="2200"/>
+                <a:spcPts val="2800"/>
               </a:spcAft>
               <a:buSzPct val="100000"/>
               <a:buChar char="•"/>
             </a:pPr>
             <a:r>
-              <a:rPr lang="ja-JP" altLang="en-US" sz="2800" dirty="0">
+              <a:rPr lang="ja-JP" altLang="en-US" sz="2400" dirty="0">
                 <a:solidFill>
                   <a:srgbClr val="262626"/>
                 </a:solidFill>
@@ -11532,18 +11443,18 @@
               </a:rPr>
               <a:t>低体温（回復が遅い。冷えた手では反応が小さく出る）</a:t>
             </a:r>
-            <a:endParaRPr lang="ja-JP" sz="2800" dirty="0"/>
-          </a:p>
-          <a:p>
-            <a:pPr algn="l" marL="406400" indent="-406400">
+            <a:endParaRPr lang="ja-JP" sz="2400" dirty="0"/>
+          </a:p>
+          <a:p>
+            <a:pPr algn="l" marL="355600" indent="-355600">
               <a:spcAft>
-                <a:spcPts val="2200"/>
+                <a:spcPts val="2800"/>
               </a:spcAft>
               <a:buSzPct val="100000"/>
               <a:buChar char="•"/>
             </a:pPr>
             <a:r>
-              <a:rPr lang="ja-JP" altLang="en-US" sz="2800" dirty="0">
+              <a:rPr lang="ja-JP" altLang="en-US" sz="2400" dirty="0">
                 <a:solidFill>
                   <a:srgbClr val="262626"/>
                 </a:solidFill>
@@ -11553,18 +11464,18 @@
               </a:rPr>
               <a:t>揮発性麻酔薬、マグネシウム、アミノグリコシド</a:t>
             </a:r>
-            <a:endParaRPr lang="ja-JP" sz="2800" dirty="0"/>
-          </a:p>
-          <a:p>
-            <a:pPr algn="l" marL="406400" indent="-406400">
+            <a:endParaRPr lang="ja-JP" sz="2400" dirty="0"/>
+          </a:p>
+          <a:p>
+            <a:pPr algn="l" marL="355600" indent="-355600">
               <a:spcAft>
-                <a:spcPts val="2200"/>
+                <a:spcPts val="2800"/>
               </a:spcAft>
               <a:buSzPct val="100000"/>
               <a:buChar char="•"/>
             </a:pPr>
             <a:r>
-              <a:rPr lang="ja-JP" altLang="en-US" sz="2800" dirty="0">
+              <a:rPr lang="ja-JP" altLang="en-US" sz="2400" dirty="0">
                 <a:solidFill>
                   <a:srgbClr val="262626"/>
                 </a:solidFill>
@@ -11574,18 +11485,18 @@
               </a:rPr>
               <a:t>追加投与が多かった、持続投与していた</a:t>
             </a:r>
-            <a:endParaRPr lang="ja-JP" sz="2800" dirty="0"/>
-          </a:p>
-          <a:p>
-            <a:pPr algn="l" marL="406400" indent="-406400">
+            <a:endParaRPr lang="ja-JP" sz="2400" dirty="0"/>
+          </a:p>
+          <a:p>
+            <a:pPr algn="l" marL="355600" indent="-355600">
               <a:spcAft>
-                <a:spcPts val="2200"/>
+                <a:spcPts val="2800"/>
               </a:spcAft>
               <a:buSzPct val="100000"/>
               <a:buChar char="•"/>
             </a:pPr>
             <a:r>
-              <a:rPr lang="ja-JP" altLang="en-US" sz="2800" dirty="0">
+              <a:rPr lang="ja-JP" altLang="en-US" sz="2400" dirty="0">
                 <a:solidFill>
                   <a:srgbClr val="262626"/>
                 </a:solidFill>
@@ -11595,7 +11506,7 @@
               </a:rPr>
               <a:t>神経筋疾患（重症筋無力症など）</a:t>
             </a:r>
-            <a:endParaRPr lang="ja-JP" sz="2800" dirty="0"/>
+            <a:endParaRPr lang="ja-JP" sz="2400" dirty="0"/>
           </a:p>
         </p:txBody>
       </p:sp>
